--- a/perception_ppt/perception_output/task/task2_implementation.pptx
+++ b/perception_ppt/perception_output/task/task2_implementation.pptx
@@ -6,24 +6,28 @@
     <p:sldMasterId id="2147483657" r:id="rId3"/>
   </p:sldMasterIdLst>
   <p:notesMasterIdLst>
-    <p:notesMasterId r:id="rId11"/>
+    <p:notesMasterId r:id="rId15"/>
   </p:notesMasterIdLst>
   <p:handoutMasterIdLst>
-    <p:handoutMasterId r:id="rId12"/>
+    <p:handoutMasterId r:id="rId16"/>
   </p:handoutMasterIdLst>
   <p:sldIdLst>
     <p:sldId id="2880" r:id="rId4"/>
-    <p:sldId id="2886" r:id="rId5"/>
-    <p:sldId id="2885" r:id="rId6"/>
-    <p:sldId id="2884" r:id="rId7"/>
-    <p:sldId id="2883" r:id="rId8"/>
-    <p:sldId id="2882" r:id="rId9"/>
-    <p:sldId id="2881" r:id="rId10"/>
+    <p:sldId id="2890" r:id="rId5"/>
+    <p:sldId id="2889" r:id="rId6"/>
+    <p:sldId id="2888" r:id="rId7"/>
+    <p:sldId id="2887" r:id="rId8"/>
+    <p:sldId id="2886" r:id="rId9"/>
+    <p:sldId id="2885" r:id="rId10"/>
+    <p:sldId id="2884" r:id="rId11"/>
+    <p:sldId id="2883" r:id="rId12"/>
+    <p:sldId id="2882" r:id="rId13"/>
+    <p:sldId id="2881" r:id="rId14"/>
   </p:sldIdLst>
   <p:sldSz cx="12192000" cy="6858000"/>
   <p:notesSz cx="6858000" cy="9144000"/>
   <p:custDataLst>
-    <p:tags r:id="rId17"/>
+    <p:tags r:id="rId21"/>
   </p:custDataLst>
   <p:defaultTextStyle>
     <a:defPPr>
@@ -6874,8 +6878,56 @@
       </p:grpSpPr>
       <p:sp>
         <p:nvSpPr>
-          <p:cNvPr id="21" name="任意多边形 44"/>
-          <p:cNvSpPr/>
+          <p:cNvPr id="35" name="文本框 34"/>
+          <p:cNvSpPr txBox="1"/>
+          <p:nvPr/>
+        </p:nvSpPr>
+        <p:spPr>
+          <a:xfrm>
+            <a:off x="0" y="793750"/>
+            <a:ext cx="1351262" cy="2061210"/>
+          </a:xfrm>
+          <a:prstGeom prst="rect">
+            <a:avLst/>
+          </a:prstGeom>
+          <a:noFill/>
+        </p:spPr>
+        <p:txBody>
+          <a:bodyPr wrap="square" rtlCol="0">
+            <a:spAutoFit/>
+            <a:scene3d>
+              <a:camera prst="orthographicFront"/>
+              <a:lightRig rig="threePt" dir="t"/>
+            </a:scene3d>
+            <a:sp3d contourW="12700"/>
+          </a:bodyPr>
+          <a:lstStyle/>
+          <a:p>
+            <a:pPr algn="ctr"/>
+            <a:r>
+              <a:rPr lang="en-US" altLang="zh-CN" sz="3200" dirty="0" smtClean="0">
+                <a:solidFill>
+                  <a:srgbClr val="3F396C"/>
+                </a:solidFill>
+                <a:latin typeface="思源宋体" panose="02020700000000000000" charset="-122"/>
+                <a:ea typeface="思源宋体" panose="02020700000000000000" charset="-122"/>
+              </a:rPr>
+              <a:t>04</a:t>
+            </a:r>
+            <a:endParaRPr lang="en-US" altLang="zh-CN" sz="3200" dirty="0" smtClean="0">
+              <a:solidFill>
+                <a:srgbClr val="3F396C"/>
+              </a:solidFill>
+              <a:latin typeface="思源宋体" panose="02020700000000000000" charset="-122"/>
+              <a:ea typeface="思源宋体" panose="02020700000000000000" charset="-122"/>
+            </a:endParaRPr>
+          </a:p>
+        </p:txBody>
+      </p:sp>
+      <p:sp>
+        <p:nvSpPr>
+          <p:cNvPr id="8" name="文本框1"/>
+          <p:cNvSpPr txBox="1"/>
           <p:nvPr>
             <p:custDataLst>
               <p:tags r:id="rId1"/>
@@ -6883,75 +6935,19 @@
           </p:nvPr>
         </p:nvSpPr>
         <p:spPr>
-          <a:xfrm flipV="1">
-            <a:off x="7538194" y="4134567"/>
-            <a:ext cx="1941223" cy="1149108"/>
-          </a:xfrm>
-          <a:custGeom>
+          <a:xfrm>
+            <a:off x="3844925" y="5423535"/>
+            <a:ext cx="4320000" cy="460375"/>
+          </a:xfrm>
+          <a:prstGeom prst="rect">
             <a:avLst/>
-            <a:gdLst>
-              <a:gd name="connsiteX0" fmla="*/ 0 w 1940313"/>
-              <a:gd name="connsiteY0" fmla="*/ 791737 h 1148576"/>
-              <a:gd name="connsiteX1" fmla="*/ 791737 w 1940313"/>
-              <a:gd name="connsiteY1" fmla="*/ 0 h 1148576"/>
-              <a:gd name="connsiteX2" fmla="*/ 1940313 w 1940313"/>
-              <a:gd name="connsiteY2" fmla="*/ 1148576 h 1148576"/>
-            </a:gdLst>
-            <a:ahLst/>
-            <a:cxnLst>
-              <a:cxn ang="0">
-                <a:pos x="connsiteX0" y="connsiteY0"/>
-              </a:cxn>
-              <a:cxn ang="0">
-                <a:pos x="connsiteX1" y="connsiteY1"/>
-              </a:cxn>
-              <a:cxn ang="0">
-                <a:pos x="connsiteX2" y="connsiteY2"/>
-              </a:cxn>
-            </a:cxnLst>
-            <a:rect l="l" t="t" r="r" b="b"/>
-            <a:pathLst>
-              <a:path w="1940313" h="1148576">
-                <a:moveTo>
-                  <a:pt x="0" y="791737"/>
-                </a:moveTo>
-                <a:lnTo>
-                  <a:pt x="791737" y="0"/>
-                </a:lnTo>
-                <a:lnTo>
-                  <a:pt x="1940313" y="1148576"/>
-                </a:lnTo>
-              </a:path>
-            </a:pathLst>
-          </a:custGeom>
+          </a:prstGeom>
           <a:noFill/>
-          <a:ln w="12700">
-            <a:solidFill>
-              <a:srgbClr val="8A8B8F"/>
-            </a:solidFill>
-            <a:prstDash val="dash"/>
-            <a:headEnd type="oval" w="med" len="med"/>
-            <a:tailEnd type="triangle" w="med" len="med"/>
-          </a:ln>
-        </p:spPr>
-        <p:style>
-          <a:lnRef idx="2">
-            <a:schemeClr val="accent1">
-              <a:shade val="50000"/>
-            </a:schemeClr>
-          </a:lnRef>
-          <a:fillRef idx="1">
-            <a:schemeClr val="accent1"/>
-          </a:fillRef>
-          <a:effectRef idx="0">
-            <a:schemeClr val="accent1"/>
-          </a:effectRef>
-          <a:fontRef idx="minor">
-            <a:schemeClr val="lt1"/>
-          </a:fontRef>
-        </p:style>
-        <p:txBody>
-          <a:bodyPr rtlCol="0" anchor="ctr"/>
+        </p:spPr>
+        <p:txBody>
+          <a:bodyPr wrap="square" rtlCol="0">
+            <a:spAutoFit/>
+          </a:bodyPr>
           <a:lstStyle/>
           <a:p>
             <a:pPr marL="0" marR="0" lvl="0" indent="0" algn="ctr" defTabSz="914400" rtl="0" eaLnBrk="1" fontAlgn="auto" latinLnBrk="0" hangingPunct="1">
@@ -6970,26 +6966,31 @@
               <a:buNone/>
               <a:defRPr/>
             </a:pPr>
-            <a:endParaRPr kumimoji="0" lang="zh-CN" altLang="en-US" sz="1800" b="0" i="0" u="none" strike="noStrike" kern="1200" cap="none" spc="0" normalizeH="0" baseline="0" noProof="0" dirty="0">
-              <a:ln>
-                <a:noFill/>
-              </a:ln>
+            <a:r>
+              <a:rPr lang="zh-CN" altLang="zh-CN" sz="2400" b="1" dirty="0" smtClean="0">
+                <a:solidFill>
+                  <a:srgbClr val="0064D2"/>
+                </a:solidFill>
+                <a:latin typeface="微软雅黑" panose="020B0503020204020204" pitchFamily="34" charset="-122"/>
+                <a:ea typeface="微软雅黑" panose="020B0503020204020204" pitchFamily="34" charset="-122"/>
+                <a:sym typeface="+mn-ea"/>
+              </a:rPr>
+              <a:t>新能源汽车市场简报助手</a:t>
+            </a:r>
+            <a:endParaRPr lang="zh-CN" altLang="zh-CN" sz="2400" b="1" dirty="0" smtClean="0">
               <a:solidFill>
-                <a:prstClr val="white"/>
+                <a:srgbClr val="0064D2"/>
               </a:solidFill>
-              <a:effectLst/>
-              <a:uLnTx/>
-              <a:uFillTx/>
-              <a:latin typeface="等线" panose="02010600030101010101" charset="-122"/>
+              <a:latin typeface="微软雅黑" panose="020B0503020204020204" pitchFamily="34" charset="-122"/>
               <a:ea typeface="微软雅黑" panose="020B0503020204020204" pitchFamily="34" charset="-122"/>
-              <a:cs typeface="+mn-cs"/>
+              <a:sym typeface="+mn-ea"/>
             </a:endParaRPr>
           </a:p>
         </p:txBody>
       </p:sp>
       <p:grpSp>
         <p:nvGrpSpPr>
-          <p:cNvPr id="7" name="组合 6"/>
+          <p:cNvPr id="2" name="组合 1"/>
           <p:cNvGrpSpPr/>
           <p:nvPr>
             <p:custDataLst>
@@ -6999,15 +7000,15 @@
         </p:nvGrpSpPr>
         <p:grpSpPr>
           <a:xfrm>
-            <a:off x="7391459" y="2641172"/>
-            <a:ext cx="1892947" cy="1892947"/>
-            <a:chOff x="4536" y="4280"/>
-            <a:chExt cx="2980" cy="2980"/>
+            <a:off x="5052140" y="2077085"/>
+            <a:ext cx="2087958" cy="2571359"/>
+            <a:chOff x="4536" y="3212"/>
+            <a:chExt cx="3287" cy="4048"/>
           </a:xfrm>
         </p:grpSpPr>
         <p:sp>
           <p:nvSpPr>
-            <p:cNvPr id="12" name="圆角矩形 34"/>
+            <p:cNvPr id="3" name="圆角矩形 34"/>
             <p:cNvSpPr/>
             <p:nvPr>
               <p:custDataLst>
@@ -7103,412 +7104,11 @@
         </p:sp>
         <p:sp>
           <p:nvSpPr>
-            <p:cNvPr id="16" name="圆角矩形 38"/>
+            <p:cNvPr id="4" name="圆角矩形 38"/>
             <p:cNvSpPr/>
             <p:nvPr>
               <p:custDataLst>
                 <p:tags r:id="rId4"/>
-              </p:custDataLst>
-            </p:nvPr>
-          </p:nvSpPr>
-          <p:spPr>
-            <a:xfrm rot="2700000">
-              <a:off x="4943" y="4671"/>
-              <a:ext cx="2185" cy="2185"/>
-            </a:xfrm>
-            <a:prstGeom prst="roundRect">
-              <a:avLst>
-                <a:gd name="adj" fmla="val 6319"/>
-              </a:avLst>
-            </a:prstGeom>
-            <a:solidFill>
-              <a:schemeClr val="tx1">
-                <a:lumMod val="65000"/>
-                <a:lumOff val="35000"/>
-              </a:schemeClr>
-            </a:solidFill>
-            <a:ln>
-              <a:noFill/>
-            </a:ln>
-          </p:spPr>
-          <p:style>
-            <a:lnRef idx="2">
-              <a:schemeClr val="accent1">
-                <a:shade val="50000"/>
-              </a:schemeClr>
-            </a:lnRef>
-            <a:fillRef idx="1">
-              <a:schemeClr val="accent1"/>
-            </a:fillRef>
-            <a:effectRef idx="0">
-              <a:schemeClr val="accent1"/>
-            </a:effectRef>
-            <a:fontRef idx="minor">
-              <a:schemeClr val="lt1"/>
-            </a:fontRef>
-          </p:style>
-          <p:txBody>
-            <a:bodyPr rtlCol="0" anchor="ctr"/>
-            <a:lstStyle/>
-            <a:p>
-              <a:pPr marL="0" marR="0" lvl="0" indent="0" algn="ctr" defTabSz="914400" rtl="0" eaLnBrk="1" fontAlgn="auto" latinLnBrk="0" hangingPunct="1">
-                <a:lnSpc>
-                  <a:spcPct val="100000"/>
-                </a:lnSpc>
-                <a:spcBef>
-                  <a:spcPts val="0"/>
-                </a:spcBef>
-                <a:spcAft>
-                  <a:spcPts val="0"/>
-                </a:spcAft>
-                <a:buClrTx/>
-                <a:buSzTx/>
-                <a:buFontTx/>
-                <a:buNone/>
-                <a:defRPr/>
-              </a:pPr>
-              <a:endParaRPr kumimoji="0" lang="zh-CN" altLang="en-US" sz="1800" b="0" i="0" u="none" strike="noStrike" kern="1200" cap="none" spc="0" normalizeH="0" baseline="0" noProof="0" dirty="0">
-                <a:ln>
-                  <a:noFill/>
-                </a:ln>
-                <a:solidFill>
-                  <a:prstClr val="white"/>
-                </a:solidFill>
-                <a:effectLst/>
-                <a:uLnTx/>
-                <a:uFillTx/>
-                <a:latin typeface="等线" panose="02010600030101010101" charset="-122"/>
-                <a:ea typeface="微软雅黑" panose="020B0503020204020204" pitchFamily="34" charset="-122"/>
-                <a:cs typeface="+mn-cs"/>
-              </a:endParaRPr>
-            </a:p>
-          </p:txBody>
-        </p:sp>
-      </p:grpSp>
-      <p:sp>
-        <p:nvSpPr>
-          <p:cNvPr id="52" name="文本框1"/>
-          <p:cNvSpPr txBox="1"/>
-          <p:nvPr>
-            <p:custDataLst>
-              <p:tags r:id="rId5"/>
-            </p:custDataLst>
-          </p:nvPr>
-        </p:nvSpPr>
-        <p:spPr>
-          <a:xfrm>
-            <a:off x="6184076" y="5350373"/>
-            <a:ext cx="4320000" cy="460375"/>
-          </a:xfrm>
-          <a:prstGeom prst="rect">
-            <a:avLst/>
-          </a:prstGeom>
-          <a:noFill/>
-        </p:spPr>
-        <p:txBody>
-          <a:bodyPr wrap="square" rtlCol="0">
-            <a:spAutoFit/>
-          </a:bodyPr>
-          <a:lstStyle/>
-          <a:p>
-            <a:pPr lvl="0" algn="ctr">
-              <a:buClrTx/>
-              <a:buSzTx/>
-              <a:buFontTx/>
-            </a:pPr>
-            <a:r>
-              <a:rPr lang="zh-CN" sz="2400" dirty="0" smtClean="0">
-                <a:cs typeface="+mn-ea"/>
-                <a:sym typeface="+mn-lt"/>
-              </a:rPr>
-              <a:t>二、会议纪要生成</a:t>
-            </a:r>
-            <a:endParaRPr lang="zh-CN" sz="2400" dirty="0" smtClean="0">
-              <a:cs typeface="+mn-ea"/>
-              <a:sym typeface="+mn-lt"/>
-            </a:endParaRPr>
-          </a:p>
-        </p:txBody>
-      </p:sp>
-      <p:sp>
-        <p:nvSpPr>
-          <p:cNvPr id="10" name="文本框 9"/>
-          <p:cNvSpPr txBox="1"/>
-          <p:nvPr>
-            <p:custDataLst>
-              <p:tags r:id="rId6"/>
-            </p:custDataLst>
-          </p:nvPr>
-        </p:nvSpPr>
-        <p:spPr>
-          <a:xfrm>
-            <a:off x="7981576" y="3119490"/>
-            <a:ext cx="682858" cy="1014730"/>
-          </a:xfrm>
-          <a:prstGeom prst="rect">
-            <a:avLst/>
-          </a:prstGeom>
-          <a:noFill/>
-        </p:spPr>
-        <p:txBody>
-          <a:bodyPr wrap="square" rtlCol="0">
-            <a:spAutoFit/>
-          </a:bodyPr>
-          <a:lstStyle/>
-          <a:p>
-            <a:r>
-              <a:rPr lang="en-US" altLang="zh-CN" sz="6000" b="1">
-                <a:solidFill>
-                  <a:schemeClr val="bg1"/>
-                </a:solidFill>
-                <a:latin typeface="+mj-ea"/>
-                <a:ea typeface="+mj-ea"/>
-              </a:rPr>
-              <a:t>2</a:t>
-            </a:r>
-            <a:endParaRPr lang="en-US" altLang="zh-CN" sz="6000" b="1">
-              <a:solidFill>
-                <a:schemeClr val="bg1"/>
-              </a:solidFill>
-              <a:latin typeface="+mj-ea"/>
-              <a:ea typeface="+mj-ea"/>
-            </a:endParaRPr>
-          </a:p>
-        </p:txBody>
-      </p:sp>
-      <p:sp>
-        <p:nvSpPr>
-          <p:cNvPr id="35" name="文本框 34"/>
-          <p:cNvSpPr txBox="1"/>
-          <p:nvPr/>
-        </p:nvSpPr>
-        <p:spPr>
-          <a:xfrm>
-            <a:off x="0" y="793750"/>
-            <a:ext cx="1351262" cy="2061210"/>
-          </a:xfrm>
-          <a:prstGeom prst="rect">
-            <a:avLst/>
-          </a:prstGeom>
-          <a:noFill/>
-        </p:spPr>
-        <p:txBody>
-          <a:bodyPr wrap="square" rtlCol="0">
-            <a:spAutoFit/>
-            <a:scene3d>
-              <a:camera prst="orthographicFront"/>
-              <a:lightRig rig="threePt" dir="t"/>
-            </a:scene3d>
-            <a:sp3d contourW="12700"/>
-          </a:bodyPr>
-          <a:lstStyle/>
-          <a:p>
-            <a:pPr algn="ctr"/>
-            <a:r>
-              <a:rPr lang="en-US" altLang="zh-CN" sz="3200" dirty="0" smtClean="0">
-                <a:solidFill>
-                  <a:srgbClr val="3F396C"/>
-                </a:solidFill>
-                <a:latin typeface="思源宋体" panose="02020700000000000000" charset="-122"/>
-                <a:ea typeface="思源宋体" panose="02020700000000000000" charset="-122"/>
-              </a:rPr>
-              <a:t>04</a:t>
-            </a:r>
-            <a:endParaRPr lang="en-US" altLang="zh-CN" sz="3200" dirty="0" smtClean="0">
-              <a:solidFill>
-                <a:srgbClr val="3F396C"/>
-              </a:solidFill>
-              <a:latin typeface="思源宋体" panose="02020700000000000000" charset="-122"/>
-              <a:ea typeface="思源宋体" panose="02020700000000000000" charset="-122"/>
-            </a:endParaRPr>
-          </a:p>
-        </p:txBody>
-      </p:sp>
-      <p:sp>
-        <p:nvSpPr>
-          <p:cNvPr id="8" name="文本框1"/>
-          <p:cNvSpPr txBox="1"/>
-          <p:nvPr>
-            <p:custDataLst>
-              <p:tags r:id="rId7"/>
-            </p:custDataLst>
-          </p:nvPr>
-        </p:nvSpPr>
-        <p:spPr>
-          <a:xfrm>
-            <a:off x="1483995" y="5350510"/>
-            <a:ext cx="4320000" cy="460375"/>
-          </a:xfrm>
-          <a:prstGeom prst="rect">
-            <a:avLst/>
-          </a:prstGeom>
-          <a:noFill/>
-        </p:spPr>
-        <p:txBody>
-          <a:bodyPr wrap="square" rtlCol="0">
-            <a:spAutoFit/>
-          </a:bodyPr>
-          <a:lstStyle/>
-          <a:p>
-            <a:pPr marL="0" marR="0" lvl="0" indent="0" algn="ctr" defTabSz="914400" rtl="0" eaLnBrk="1" fontAlgn="auto" latinLnBrk="0" hangingPunct="1">
-              <a:lnSpc>
-                <a:spcPct val="100000"/>
-              </a:lnSpc>
-              <a:spcBef>
-                <a:spcPts val="0"/>
-              </a:spcBef>
-              <a:spcAft>
-                <a:spcPts val="0"/>
-              </a:spcAft>
-              <a:buClrTx/>
-              <a:buSzTx/>
-              <a:buFontTx/>
-              <a:buNone/>
-              <a:defRPr/>
-            </a:pPr>
-            <a:r>
-              <a:rPr lang="zh-CN" altLang="zh-CN" sz="2400" b="1" dirty="0" smtClean="0">
-                <a:solidFill>
-                  <a:srgbClr val="0064D2"/>
-                </a:solidFill>
-                <a:latin typeface="微软雅黑" panose="020B0503020204020204" pitchFamily="34" charset="-122"/>
-                <a:ea typeface="微软雅黑" panose="020B0503020204020204" pitchFamily="34" charset="-122"/>
-                <a:sym typeface="+mn-ea"/>
-              </a:rPr>
-              <a:t>一、智能客服回复优化</a:t>
-            </a:r>
-            <a:endParaRPr lang="zh-CN" altLang="zh-CN" sz="2400" b="1" dirty="0" smtClean="0">
-              <a:solidFill>
-                <a:srgbClr val="0064D2"/>
-              </a:solidFill>
-              <a:latin typeface="微软雅黑" panose="020B0503020204020204" pitchFamily="34" charset="-122"/>
-              <a:ea typeface="微软雅黑" panose="020B0503020204020204" pitchFamily="34" charset="-122"/>
-              <a:sym typeface="+mn-ea"/>
-            </a:endParaRPr>
-          </a:p>
-        </p:txBody>
-      </p:sp>
-      <p:grpSp>
-        <p:nvGrpSpPr>
-          <p:cNvPr id="2" name="组合 1"/>
-          <p:cNvGrpSpPr/>
-          <p:nvPr>
-            <p:custDataLst>
-              <p:tags r:id="rId8"/>
-            </p:custDataLst>
-          </p:nvPr>
-        </p:nvGrpSpPr>
-        <p:grpSpPr>
-          <a:xfrm>
-            <a:off x="2691210" y="2004060"/>
-            <a:ext cx="2087958" cy="2571359"/>
-            <a:chOff x="4536" y="3212"/>
-            <a:chExt cx="3287" cy="4048"/>
-          </a:xfrm>
-        </p:grpSpPr>
-        <p:sp>
-          <p:nvSpPr>
-            <p:cNvPr id="3" name="圆角矩形 34"/>
-            <p:cNvSpPr/>
-            <p:nvPr>
-              <p:custDataLst>
-                <p:tags r:id="rId9"/>
-              </p:custDataLst>
-            </p:nvPr>
-          </p:nvSpPr>
-          <p:spPr>
-            <a:xfrm rot="2700000">
-              <a:off x="4536" y="4280"/>
-              <a:ext cx="2980" cy="2980"/>
-            </a:xfrm>
-            <a:prstGeom prst="roundRect">
-              <a:avLst>
-                <a:gd name="adj" fmla="val 6319"/>
-              </a:avLst>
-            </a:prstGeom>
-            <a:solidFill>
-              <a:schemeClr val="bg1">
-                <a:lumMod val="95000"/>
-              </a:schemeClr>
-            </a:solidFill>
-            <a:ln>
-              <a:noFill/>
-            </a:ln>
-            <a:effectLst>
-              <a:outerShdw blurRad="152400" dist="63500" dir="8100000" algn="tl" rotWithShape="0">
-                <a:prstClr val="black">
-                  <a:alpha val="30000"/>
-                </a:prstClr>
-              </a:outerShdw>
-            </a:effectLst>
-            <a:scene3d>
-              <a:camera prst="orthographicFront"/>
-              <a:lightRig rig="threePt" dir="t"/>
-            </a:scene3d>
-            <a:sp3d prstMaterial="softEdge">
-              <a:bevelT w="38100" h="6350"/>
-            </a:sp3d>
-          </p:spPr>
-          <p:style>
-            <a:lnRef idx="2">
-              <a:schemeClr val="accent1">
-                <a:shade val="50000"/>
-              </a:schemeClr>
-            </a:lnRef>
-            <a:fillRef idx="1">
-              <a:schemeClr val="accent1"/>
-            </a:fillRef>
-            <a:effectRef idx="0">
-              <a:schemeClr val="accent1"/>
-            </a:effectRef>
-            <a:fontRef idx="minor">
-              <a:schemeClr val="lt1"/>
-            </a:fontRef>
-          </p:style>
-          <p:txBody>
-            <a:bodyPr rtlCol="0" anchor="ctr"/>
-            <a:lstStyle/>
-            <a:p>
-              <a:pPr marL="0" marR="0" lvl="0" indent="0" algn="ctr" defTabSz="914400" rtl="0" eaLnBrk="1" fontAlgn="auto" latinLnBrk="0" hangingPunct="1">
-                <a:lnSpc>
-                  <a:spcPct val="100000"/>
-                </a:lnSpc>
-                <a:spcBef>
-                  <a:spcPts val="0"/>
-                </a:spcBef>
-                <a:spcAft>
-                  <a:spcPts val="0"/>
-                </a:spcAft>
-                <a:buClrTx/>
-                <a:buSzTx/>
-                <a:buFontTx/>
-                <a:buNone/>
-                <a:defRPr/>
-              </a:pPr>
-              <a:endParaRPr kumimoji="0" lang="zh-CN" altLang="en-US" sz="2800" b="0" i="0" u="none" strike="noStrike" kern="1200" cap="none" spc="0" normalizeH="0" baseline="0" noProof="0" dirty="0">
-                <a:ln>
-                  <a:noFill/>
-                </a:ln>
-                <a:solidFill>
-                  <a:prstClr val="white"/>
-                </a:solidFill>
-                <a:effectLst/>
-                <a:uLnTx/>
-                <a:uFillTx/>
-                <a:latin typeface="DIN-BoldItalic" pitchFamily="50" charset="0"/>
-                <a:ea typeface="微软雅黑" panose="020B0503020204020204" pitchFamily="34" charset="-122"/>
-                <a:cs typeface="+mn-cs"/>
-              </a:endParaRPr>
-            </a:p>
-          </p:txBody>
-        </p:sp>
-        <p:sp>
-          <p:nvSpPr>
-            <p:cNvPr id="4" name="圆角矩形 38"/>
-            <p:cNvSpPr/>
-            <p:nvPr>
-              <p:custDataLst>
-                <p:tags r:id="rId10"/>
               </p:custDataLst>
             </p:nvPr>
           </p:nvSpPr>
@@ -7590,7 +7190,7 @@
             <p:cNvSpPr/>
             <p:nvPr>
               <p:custDataLst>
-                <p:tags r:id="rId11"/>
+                <p:tags r:id="rId5"/>
               </p:custDataLst>
             </p:nvPr>
           </p:nvSpPr>
@@ -7706,13 +7306,13 @@
           <p:cNvSpPr txBox="1"/>
           <p:nvPr>
             <p:custDataLst>
-              <p:tags r:id="rId12"/>
+              <p:tags r:id="rId6"/>
             </p:custDataLst>
           </p:nvPr>
         </p:nvSpPr>
         <p:spPr>
           <a:xfrm>
-            <a:off x="3281327" y="3153168"/>
+            <a:off x="5642257" y="3226193"/>
             <a:ext cx="682858" cy="1014730"/>
           </a:xfrm>
           <a:prstGeom prst="rect">
@@ -7850,7 +7450,7 @@
 </p:sld>
 </file>
 
-<file path=ppt/slides/slide2.xml><?xml version="1.0" encoding="utf-8"?>
+<file path=ppt/slides/slide10.xml><?xml version="1.0" encoding="utf-8"?>
 <p:sld xmlns:a="http://schemas.openxmlformats.org/drawingml/2006/main" xmlns:r="http://schemas.openxmlformats.org/officeDocument/2006/relationships" xmlns:p="http://schemas.openxmlformats.org/presentationml/2006/main">
   <p:cSld>
     <p:spTree>
@@ -7900,7 +7500,7 @@
                 <a:ea typeface="微软雅黑" panose="020B0503020204020204" pitchFamily="34" charset="-122"/>
                 <a:cs typeface="微软雅黑" panose="020B0503020204020204" pitchFamily="34" charset="-122"/>
               </a:rPr>
-              <a:t>某智能门锁企业的客服部门计划上线一个客服</a:t>
+              <a:t>在实际工程项目中，上传的文件往往不像课程用例那样标准，可能会存在缺失值、格式错误甚至文件失效等问题。因此，在数据预处理的同时，需要添加验证逻辑来应对这些异常情况。如果文件存在问题，工作流应能将其引导至其他处理路由，而不是直接崩溃或产生错误结果。这部分逻辑可以通过修改</a:t>
             </a:r>
             <a:r>
               <a:rPr lang="en-US" altLang="zh-CN" dirty="0" smtClean="0">
@@ -7908,7 +7508,7 @@
                 <a:ea typeface="微软雅黑" panose="020B0503020204020204" pitchFamily="34" charset="-122"/>
                 <a:cs typeface="微软雅黑" panose="020B0503020204020204" pitchFamily="34" charset="-122"/>
               </a:rPr>
-              <a:t>Agent</a:t>
+              <a:t>“</a:t>
             </a:r>
             <a:r>
               <a:rPr lang="zh-CN" altLang="en-US" dirty="0" smtClean="0">
@@ -7916,7 +7516,7 @@
                 <a:ea typeface="微软雅黑" panose="020B0503020204020204" pitchFamily="34" charset="-122"/>
                 <a:cs typeface="微软雅黑" panose="020B0503020204020204" pitchFamily="34" charset="-122"/>
               </a:rPr>
-              <a:t>，用于自动处理用户的常见咨询。教师通过这个案例让学员理解一个核心观点：同一项任务，如果提示词不够清晰，模型输出就会缺乏专业性和稳定性；反之，如果提示词结构清晰，输出则会明显更贴近业务场景。用户输入示例如下：</a:t>
+              <a:t>数据预处理</a:t>
             </a:r>
             <a:r>
               <a:rPr lang="en-US" altLang="zh-CN" dirty="0" smtClean="0">
@@ -7924,7 +7524,7 @@
                 <a:ea typeface="微软雅黑" panose="020B0503020204020204" pitchFamily="34" charset="-122"/>
                 <a:cs typeface="微软雅黑" panose="020B0503020204020204" pitchFamily="34" charset="-122"/>
               </a:rPr>
-              <a:t>V1</a:t>
+              <a:t>”</a:t>
             </a:r>
             <a:r>
               <a:rPr lang="zh-CN" altLang="en-US" dirty="0" smtClean="0">
@@ -7932,23 +7532,7 @@
                 <a:ea typeface="微软雅黑" panose="020B0503020204020204" pitchFamily="34" charset="-122"/>
                 <a:cs typeface="微软雅黑" panose="020B0503020204020204" pitchFamily="34" charset="-122"/>
               </a:rPr>
-              <a:t>版提示词是在</a:t>
-            </a:r>
-            <a:r>
-              <a:rPr lang="en-US" altLang="zh-CN" dirty="0" smtClean="0">
-                <a:latin typeface="微软雅黑" panose="020B0503020204020204" pitchFamily="34" charset="-122"/>
-                <a:ea typeface="微软雅黑" panose="020B0503020204020204" pitchFamily="34" charset="-122"/>
-                <a:cs typeface="微软雅黑" panose="020B0503020204020204" pitchFamily="34" charset="-122"/>
-              </a:rPr>
-              <a:t>RAGFlow</a:t>
-            </a:r>
-            <a:r>
-              <a:rPr lang="zh-CN" altLang="en-US" dirty="0" smtClean="0">
-                <a:latin typeface="微软雅黑" panose="020B0503020204020204" pitchFamily="34" charset="-122"/>
-                <a:ea typeface="微软雅黑" panose="020B0503020204020204" pitchFamily="34" charset="-122"/>
-                <a:cs typeface="微软雅黑" panose="020B0503020204020204" pitchFamily="34" charset="-122"/>
-              </a:rPr>
-              <a:t>中设置的简易提示词，直接根据用户问题生成回答。学员需要思考如何利用所学的评估方法测试这组提示词的潜在问题，并通过提示词工程为其添加约束，构建新的提示词版本。在测试过程中，需要记录常见问题，例如回答泛化、缺少分类、遗漏已知信息、缺少边界提示等。通过反复测试和提问，根据产生的问题不断迭代提示词，最终形成优化版本。</a:t>
+              <a:t>代码模块来实现。</a:t>
             </a:r>
             <a:endParaRPr lang="zh-CN" altLang="en-US" dirty="0" smtClean="0">
               <a:latin typeface="微软雅黑" panose="020B0503020204020204" pitchFamily="34" charset="-122"/>
@@ -8177,7 +7761,7 @@
 </p:sld>
 </file>
 
-<file path=ppt/slides/slide3.xml><?xml version="1.0" encoding="utf-8"?>
+<file path=ppt/slides/slide11.xml><?xml version="1.0" encoding="utf-8"?>
 <p:sld xmlns:a="http://schemas.openxmlformats.org/drawingml/2006/main" xmlns:r="http://schemas.openxmlformats.org/officeDocument/2006/relationships" xmlns:p="http://schemas.openxmlformats.org/presentationml/2006/main">
   <p:cSld>
     <p:spTree>
@@ -8222,12 +7806,20 @@
               </a:lnSpc>
             </a:pPr>
             <a:r>
-              <a:rPr lang="en-US" dirty="0" smtClean="0">
-                <a:latin typeface="微软雅黑" panose="020B0503020204020204" pitchFamily="34" charset="-122"/>
-                <a:ea typeface="微软雅黑" panose="020B0503020204020204" pitchFamily="34" charset="-122"/>
-                <a:cs typeface="微软雅黑" panose="020B0503020204020204" pitchFamily="34" charset="-122"/>
-              </a:rPr>
-              <a:t>V2</a:t>
+              <a:rPr lang="zh-CN" dirty="0" smtClean="0">
+                <a:latin typeface="微软雅黑" panose="020B0503020204020204" pitchFamily="34" charset="-122"/>
+                <a:ea typeface="微软雅黑" panose="020B0503020204020204" pitchFamily="34" charset="-122"/>
+                <a:cs typeface="微软雅黑" panose="020B0503020204020204" pitchFamily="34" charset="-122"/>
+              </a:rPr>
+              <a:t>通过编写校验机制，并配合问题分类节点，可以将一些基础错误在工作流初期就隔绝在外。具体配置时，设置输入变量为</a:t>
+            </a:r>
+            <a:r>
+              <a:rPr lang="en-US" altLang="zh-CN" dirty="0" smtClean="0">
+                <a:latin typeface="微软雅黑" panose="020B0503020204020204" pitchFamily="34" charset="-122"/>
+                <a:ea typeface="微软雅黑" panose="020B0503020204020204" pitchFamily="34" charset="-122"/>
+                <a:cs typeface="微软雅黑" panose="020B0503020204020204" pitchFamily="34" charset="-122"/>
+              </a:rPr>
+              <a:t>String</a:t>
             </a:r>
             <a:r>
               <a:rPr lang="zh-CN" altLang="en-US" dirty="0" smtClean="0">
@@ -8235,7 +7827,7 @@
                 <a:ea typeface="微软雅黑" panose="020B0503020204020204" pitchFamily="34" charset="-122"/>
                 <a:cs typeface="微软雅黑" panose="020B0503020204020204" pitchFamily="34" charset="-122"/>
               </a:rPr>
-              <a:t>版提示词是经过优化后的版本，它通过扩充测试样例，对提示词进行了更精细的约束。通过对比两版提示词得到的输出结果可以发现，第一版通常会直接给出建议，但很少体现</a:t>
+              <a:t>格式的</a:t>
             </a:r>
             <a:r>
               <a:rPr lang="en-US" altLang="zh-CN" dirty="0" smtClean="0">
@@ -8251,7 +7843,7 @@
                 <a:ea typeface="微软雅黑" panose="020B0503020204020204" pitchFamily="34" charset="-122"/>
                 <a:cs typeface="微软雅黑" panose="020B0503020204020204" pitchFamily="34" charset="-122"/>
               </a:rPr>
-              <a:t>售后支持</a:t>
+              <a:t>数据处理</a:t>
             </a:r>
             <a:r>
               <a:rPr lang="en-US" altLang="zh-CN" dirty="0" smtClean="0">
@@ -8259,7 +7851,7 @@
                 <a:ea typeface="微软雅黑" panose="020B0503020204020204" pitchFamily="34" charset="-122"/>
                 <a:cs typeface="微软雅黑" panose="020B0503020204020204" pitchFamily="34" charset="-122"/>
               </a:rPr>
-              <a:t>”</a:t>
+              <a:t>/content”</a:t>
             </a:r>
             <a:r>
               <a:rPr lang="zh-CN" altLang="en-US" dirty="0" smtClean="0">
@@ -8267,7 +7859,7 @@
                 <a:ea typeface="微软雅黑" panose="020B0503020204020204" pitchFamily="34" charset="-122"/>
                 <a:cs typeface="微软雅黑" panose="020B0503020204020204" pitchFamily="34" charset="-122"/>
               </a:rPr>
-              <a:t>的身份，回答显得泛化且缺乏针对性。而优化版更容易先识别用户问题是否属于</a:t>
+              <a:t>，并定义两个问题分类，分别对应</a:t>
             </a:r>
             <a:r>
               <a:rPr lang="en-US" altLang="zh-CN" dirty="0" smtClean="0">
@@ -8275,6 +7867,54 @@
                 <a:ea typeface="微软雅黑" panose="020B0503020204020204" pitchFamily="34" charset="-122"/>
                 <a:cs typeface="微软雅黑" panose="020B0503020204020204" pitchFamily="34" charset="-122"/>
               </a:rPr>
+              <a:t>“ok”</a:t>
+            </a:r>
+            <a:r>
+              <a:rPr lang="zh-CN" altLang="en-US" dirty="0" smtClean="0">
+                <a:latin typeface="微软雅黑" panose="020B0503020204020204" pitchFamily="34" charset="-122"/>
+                <a:ea typeface="微软雅黑" panose="020B0503020204020204" pitchFamily="34" charset="-122"/>
+                <a:cs typeface="微软雅黑" panose="020B0503020204020204" pitchFamily="34" charset="-122"/>
+              </a:rPr>
+              <a:t>变量结果为</a:t>
+            </a:r>
+            <a:r>
+              <a:rPr lang="en-US" altLang="zh-CN" dirty="0" smtClean="0">
+                <a:latin typeface="微软雅黑" panose="020B0503020204020204" pitchFamily="34" charset="-122"/>
+                <a:ea typeface="微软雅黑" panose="020B0503020204020204" pitchFamily="34" charset="-122"/>
+                <a:cs typeface="微软雅黑" panose="020B0503020204020204" pitchFamily="34" charset="-122"/>
+              </a:rPr>
+              <a:t>True</a:t>
+            </a:r>
+            <a:r>
+              <a:rPr lang="zh-CN" altLang="en-US" dirty="0" smtClean="0">
+                <a:latin typeface="微软雅黑" panose="020B0503020204020204" pitchFamily="34" charset="-122"/>
+                <a:ea typeface="微软雅黑" panose="020B0503020204020204" pitchFamily="34" charset="-122"/>
+                <a:cs typeface="微软雅黑" panose="020B0503020204020204" pitchFamily="34" charset="-122"/>
+              </a:rPr>
+              <a:t>和</a:t>
+            </a:r>
+            <a:r>
+              <a:rPr lang="en-US" altLang="zh-CN" dirty="0" smtClean="0">
+                <a:latin typeface="微软雅黑" panose="020B0503020204020204" pitchFamily="34" charset="-122"/>
+                <a:ea typeface="微软雅黑" panose="020B0503020204020204" pitchFamily="34" charset="-122"/>
+                <a:cs typeface="微软雅黑" panose="020B0503020204020204" pitchFamily="34" charset="-122"/>
+              </a:rPr>
+              <a:t>False</a:t>
+            </a:r>
+            <a:r>
+              <a:rPr lang="zh-CN" altLang="en-US" dirty="0" smtClean="0">
+                <a:latin typeface="微软雅黑" panose="020B0503020204020204" pitchFamily="34" charset="-122"/>
+                <a:ea typeface="微软雅黑" panose="020B0503020204020204" pitchFamily="34" charset="-122"/>
+                <a:cs typeface="微软雅黑" panose="020B0503020204020204" pitchFamily="34" charset="-122"/>
+              </a:rPr>
+              <a:t>的情况。对于错误结果，返回节点配置使用的输出变量同样是</a:t>
+            </a:r>
+            <a:r>
+              <a:rPr lang="en-US" altLang="zh-CN" dirty="0" smtClean="0">
+                <a:latin typeface="微软雅黑" panose="020B0503020204020204" pitchFamily="34" charset="-122"/>
+                <a:ea typeface="微软雅黑" panose="020B0503020204020204" pitchFamily="34" charset="-122"/>
+                <a:cs typeface="微软雅黑" panose="020B0503020204020204" pitchFamily="34" charset="-122"/>
+              </a:rPr>
               <a:t>“</a:t>
             </a:r>
             <a:r>
@@ -8283,7 +7923,7 @@
                 <a:ea typeface="微软雅黑" panose="020B0503020204020204" pitchFamily="34" charset="-122"/>
                 <a:cs typeface="微软雅黑" panose="020B0503020204020204" pitchFamily="34" charset="-122"/>
               </a:rPr>
-              <a:t>联网问题</a:t>
+              <a:t>数据处理</a:t>
             </a:r>
             <a:r>
               <a:rPr lang="en-US" altLang="zh-CN" dirty="0" smtClean="0">
@@ -8291,7 +7931,7 @@
                 <a:ea typeface="微软雅黑" panose="020B0503020204020204" pitchFamily="34" charset="-122"/>
                 <a:cs typeface="微软雅黑" panose="020B0503020204020204" pitchFamily="34" charset="-122"/>
               </a:rPr>
-              <a:t>”</a:t>
+              <a:t>/content”</a:t>
             </a:r>
             <a:r>
               <a:rPr lang="zh-CN" altLang="en-US" dirty="0" smtClean="0">
@@ -8299,7 +7939,23 @@
                 <a:ea typeface="微软雅黑" panose="020B0503020204020204" pitchFamily="34" charset="-122"/>
                 <a:cs typeface="微软雅黑" panose="020B0503020204020204" pitchFamily="34" charset="-122"/>
               </a:rPr>
-              <a:t>，并按照结构化的方式输出内容。这种优化后的输出更适合后续接入工单系统或用于页面展示，因为它不仅更专业，还具备了清晰的分类和边界，能够直接服务于业务场景。这一对比清晰地展示了提示词工程在提升模型输出质量中的关键作用。</a:t>
+              <a:t>，因为该变量中已经保存了错误信息。这样，在运行过程中，工作流就能自动测试文件是否正常，以及能否以所需格式接收数据。统一约定并校验这些信息，有助于智能体工作流的稳定搭建和后续扩展。学员可以通过将</a:t>
+            </a:r>
+            <a:r>
+              <a:rPr lang="en-US" altLang="zh-CN" dirty="0" smtClean="0">
+                <a:latin typeface="微软雅黑" panose="020B0503020204020204" pitchFamily="34" charset="-122"/>
+                <a:ea typeface="微软雅黑" panose="020B0503020204020204" pitchFamily="34" charset="-122"/>
+                <a:cs typeface="微软雅黑" panose="020B0503020204020204" pitchFamily="34" charset="-122"/>
+              </a:rPr>
+              <a:t>CSV</a:t>
+            </a:r>
+            <a:r>
+              <a:rPr lang="zh-CN" altLang="en-US" dirty="0" smtClean="0">
+                <a:latin typeface="微软雅黑" panose="020B0503020204020204" pitchFamily="34" charset="-122"/>
+                <a:ea typeface="微软雅黑" panose="020B0503020204020204" pitchFamily="34" charset="-122"/>
+                <a:cs typeface="微软雅黑" panose="020B0503020204020204" pitchFamily="34" charset="-122"/>
+              </a:rPr>
+              <a:t>表格复制备份并删除其中一两行关键列的方式，来测试校验效果是否能顺利执行。</a:t>
             </a:r>
             <a:endParaRPr lang="zh-CN" altLang="en-US" dirty="0" smtClean="0">
               <a:latin typeface="微软雅黑" panose="020B0503020204020204" pitchFamily="34" charset="-122"/>
@@ -8528,7 +8184,7 @@
 </p:sld>
 </file>
 
-<file path=ppt/slides/slide4.xml><?xml version="1.0" encoding="utf-8"?>
+<file path=ppt/slides/slide2.xml><?xml version="1.0" encoding="utf-8"?>
 <p:sld xmlns:a="http://schemas.openxmlformats.org/drawingml/2006/main" xmlns:r="http://schemas.openxmlformats.org/officeDocument/2006/relationships" xmlns:p="http://schemas.openxmlformats.org/presentationml/2006/main">
   <p:cSld>
     <p:spTree>
@@ -8547,65 +8203,142 @@
       </p:grpSpPr>
       <p:sp>
         <p:nvSpPr>
-          <p:cNvPr id="21" name="任意多边形 44"/>
+          <p:cNvPr id="3" name="文本框 2"/>
+          <p:cNvSpPr txBox="1"/>
+          <p:nvPr/>
+        </p:nvSpPr>
+        <p:spPr>
+          <a:xfrm>
+            <a:off x="1175385" y="1377315"/>
+            <a:ext cx="9841230" cy="2282190"/>
+          </a:xfrm>
+          <a:prstGeom prst="rect">
+            <a:avLst/>
+          </a:prstGeom>
+          <a:noFill/>
+        </p:spPr>
+        <p:txBody>
+          <a:bodyPr wrap="square" rtlCol="0" anchor="t">
+            <a:noAutofit/>
+          </a:bodyPr>
+          <a:lstStyle/>
+          <a:p>
+            <a:pPr indent="457200" fontAlgn="auto">
+              <a:lnSpc>
+                <a:spcPct val="150000"/>
+              </a:lnSpc>
+            </a:pPr>
+            <a:r>
+              <a:rPr lang="zh-CN" dirty="0" smtClean="0">
+                <a:latin typeface="微软雅黑" panose="020B0503020204020204" pitchFamily="34" charset="-122"/>
+                <a:ea typeface="微软雅黑" panose="020B0503020204020204" pitchFamily="34" charset="-122"/>
+                <a:cs typeface="微软雅黑" panose="020B0503020204020204" pitchFamily="34" charset="-122"/>
+              </a:rPr>
+              <a:t>本案例使用的原始数据来源于</a:t>
+            </a:r>
+            <a:r>
+              <a:rPr lang="en-US" altLang="zh-CN" dirty="0" smtClean="0">
+                <a:latin typeface="微软雅黑" panose="020B0503020204020204" pitchFamily="34" charset="-122"/>
+                <a:ea typeface="微软雅黑" panose="020B0503020204020204" pitchFamily="34" charset="-122"/>
+                <a:cs typeface="微软雅黑" panose="020B0503020204020204" pitchFamily="34" charset="-122"/>
+              </a:rPr>
+              <a:t>Our World in Data</a:t>
+            </a:r>
+            <a:r>
+              <a:rPr lang="zh-CN" altLang="en-US" dirty="0" smtClean="0">
+                <a:latin typeface="微软雅黑" panose="020B0503020204020204" pitchFamily="34" charset="-122"/>
+                <a:ea typeface="微软雅黑" panose="020B0503020204020204" pitchFamily="34" charset="-122"/>
+                <a:cs typeface="微软雅黑" panose="020B0503020204020204" pitchFamily="34" charset="-122"/>
+              </a:rPr>
+              <a:t>网站的电动汽车专题页面，该页面提供了全球电动汽车市场的公开统计数据。为了适配</a:t>
+            </a:r>
+            <a:r>
+              <a:rPr lang="en-US" altLang="zh-CN" dirty="0" smtClean="0">
+                <a:latin typeface="微软雅黑" panose="020B0503020204020204" pitchFamily="34" charset="-122"/>
+                <a:ea typeface="微软雅黑" panose="020B0503020204020204" pitchFamily="34" charset="-122"/>
+                <a:cs typeface="微软雅黑" panose="020B0503020204020204" pitchFamily="34" charset="-122"/>
+              </a:rPr>
+              <a:t>RAGFlow</a:t>
+            </a:r>
+            <a:r>
+              <a:rPr lang="zh-CN" altLang="en-US" dirty="0" smtClean="0">
+                <a:latin typeface="微软雅黑" panose="020B0503020204020204" pitchFamily="34" charset="-122"/>
+                <a:ea typeface="微软雅黑" panose="020B0503020204020204" pitchFamily="34" charset="-122"/>
+                <a:cs typeface="微软雅黑" panose="020B0503020204020204" pitchFamily="34" charset="-122"/>
+              </a:rPr>
+              <a:t>平台的上传操作，我们将原始数据处理成一份教学样本，其中包含了</a:t>
+            </a:r>
+            <a:r>
+              <a:rPr lang="en-US" altLang="zh-CN" dirty="0" smtClean="0">
+                <a:latin typeface="微软雅黑" panose="020B0503020204020204" pitchFamily="34" charset="-122"/>
+                <a:ea typeface="微软雅黑" panose="020B0503020204020204" pitchFamily="34" charset="-122"/>
+                <a:cs typeface="微软雅黑" panose="020B0503020204020204" pitchFamily="34" charset="-122"/>
+              </a:rPr>
+              <a:t>2019</a:t>
+            </a:r>
+            <a:r>
+              <a:rPr lang="zh-CN" altLang="en-US" dirty="0" smtClean="0">
+                <a:latin typeface="微软雅黑" panose="020B0503020204020204" pitchFamily="34" charset="-122"/>
+                <a:ea typeface="微软雅黑" panose="020B0503020204020204" pitchFamily="34" charset="-122"/>
+                <a:cs typeface="微软雅黑" panose="020B0503020204020204" pitchFamily="34" charset="-122"/>
+              </a:rPr>
+              <a:t>年至</a:t>
+            </a:r>
+            <a:r>
+              <a:rPr lang="en-US" altLang="zh-CN" dirty="0" smtClean="0">
+                <a:latin typeface="微软雅黑" panose="020B0503020204020204" pitchFamily="34" charset="-122"/>
+                <a:ea typeface="微软雅黑" panose="020B0503020204020204" pitchFamily="34" charset="-122"/>
+                <a:cs typeface="微软雅黑" panose="020B0503020204020204" pitchFamily="34" charset="-122"/>
+              </a:rPr>
+              <a:t>2024</a:t>
+            </a:r>
+            <a:r>
+              <a:rPr lang="zh-CN" altLang="en-US" dirty="0" smtClean="0">
+                <a:latin typeface="微软雅黑" panose="020B0503020204020204" pitchFamily="34" charset="-122"/>
+                <a:ea typeface="微软雅黑" panose="020B0503020204020204" pitchFamily="34" charset="-122"/>
+                <a:cs typeface="微软雅黑" panose="020B0503020204020204" pitchFamily="34" charset="-122"/>
+              </a:rPr>
+              <a:t>年间</a:t>
+            </a:r>
+            <a:r>
+              <a:rPr lang="en-US" altLang="zh-CN" dirty="0" smtClean="0">
+                <a:latin typeface="微软雅黑" panose="020B0503020204020204" pitchFamily="34" charset="-122"/>
+                <a:ea typeface="微软雅黑" panose="020B0503020204020204" pitchFamily="34" charset="-122"/>
+                <a:cs typeface="微软雅黑" panose="020B0503020204020204" pitchFamily="34" charset="-122"/>
+              </a:rPr>
+              <a:t>12</a:t>
+            </a:r>
+            <a:r>
+              <a:rPr lang="zh-CN" altLang="en-US" dirty="0" smtClean="0">
+                <a:latin typeface="微软雅黑" panose="020B0503020204020204" pitchFamily="34" charset="-122"/>
+                <a:ea typeface="微软雅黑" panose="020B0503020204020204" pitchFamily="34" charset="-122"/>
+                <a:cs typeface="微软雅黑" panose="020B0503020204020204" pitchFamily="34" charset="-122"/>
+              </a:rPr>
+              <a:t>个国家的相关数据。这份教学样本以表格形式存储，存放在指定的路径中，是后续所有分析工作的基础材料。</a:t>
+            </a:r>
+            <a:endParaRPr lang="zh-CN" altLang="en-US" dirty="0" smtClean="0">
+              <a:latin typeface="微软雅黑" panose="020B0503020204020204" pitchFamily="34" charset="-122"/>
+              <a:ea typeface="微软雅黑" panose="020B0503020204020204" pitchFamily="34" charset="-122"/>
+              <a:cs typeface="微软雅黑" panose="020B0503020204020204" pitchFamily="34" charset="-122"/>
+            </a:endParaRPr>
+          </a:p>
+        </p:txBody>
+      </p:sp>
+      <p:sp>
+        <p:nvSpPr>
+          <p:cNvPr id="6" name="矩形 5"/>
           <p:cNvSpPr/>
-          <p:nvPr>
-            <p:custDataLst>
-              <p:tags r:id="rId1"/>
-            </p:custDataLst>
-          </p:nvPr>
-        </p:nvSpPr>
-        <p:spPr>
-          <a:xfrm flipV="1">
-            <a:off x="7538194" y="4134567"/>
-            <a:ext cx="1941223" cy="1149108"/>
-          </a:xfrm>
-          <a:custGeom>
+          <p:nvPr/>
+        </p:nvSpPr>
+        <p:spPr>
+          <a:xfrm>
+            <a:off x="1954896" y="3657124"/>
+            <a:ext cx="8211454" cy="2991484"/>
+          </a:xfrm>
+          <a:prstGeom prst="rect">
             <a:avLst/>
-            <a:gdLst>
-              <a:gd name="connsiteX0" fmla="*/ 0 w 1940313"/>
-              <a:gd name="connsiteY0" fmla="*/ 791737 h 1148576"/>
-              <a:gd name="connsiteX1" fmla="*/ 791737 w 1940313"/>
-              <a:gd name="connsiteY1" fmla="*/ 0 h 1148576"/>
-              <a:gd name="connsiteX2" fmla="*/ 1940313 w 1940313"/>
-              <a:gd name="connsiteY2" fmla="*/ 1148576 h 1148576"/>
-            </a:gdLst>
-            <a:ahLst/>
-            <a:cxnLst>
-              <a:cxn ang="0">
-                <a:pos x="connsiteX0" y="connsiteY0"/>
-              </a:cxn>
-              <a:cxn ang="0">
-                <a:pos x="connsiteX1" y="connsiteY1"/>
-              </a:cxn>
-              <a:cxn ang="0">
-                <a:pos x="connsiteX2" y="connsiteY2"/>
-              </a:cxn>
-            </a:cxnLst>
-            <a:rect l="l" t="t" r="r" b="b"/>
-            <a:pathLst>
-              <a:path w="1940313" h="1148576">
-                <a:moveTo>
-                  <a:pt x="0" y="791737"/>
-                </a:moveTo>
-                <a:lnTo>
-                  <a:pt x="791737" y="0"/>
-                </a:lnTo>
-                <a:lnTo>
-                  <a:pt x="1940313" y="1148576"/>
-                </a:lnTo>
-              </a:path>
-            </a:pathLst>
-          </a:custGeom>
+          </a:prstGeom>
           <a:noFill/>
-          <a:ln w="12700">
-            <a:solidFill>
-              <a:srgbClr val="8A8B8F"/>
-            </a:solidFill>
-            <a:prstDash val="dash"/>
-            <a:headEnd type="oval" w="med" len="med"/>
-            <a:tailEnd type="triangle" w="med" len="med"/>
-          </a:ln>
         </p:spPr>
         <p:style>
           <a:lnRef idx="2">
@@ -8627,341 +8360,33 @@
           <a:bodyPr rtlCol="0" anchor="ctr"/>
           <a:lstStyle/>
           <a:p>
-            <a:pPr marL="0" marR="0" lvl="0" indent="0" algn="ctr" defTabSz="914400" rtl="0" eaLnBrk="1" fontAlgn="auto" latinLnBrk="0" hangingPunct="1">
-              <a:lnSpc>
-                <a:spcPct val="100000"/>
-              </a:lnSpc>
-              <a:spcBef>
-                <a:spcPts val="0"/>
-              </a:spcBef>
-              <a:spcAft>
-                <a:spcPts val="0"/>
-              </a:spcAft>
-              <a:buClrTx/>
-              <a:buSzTx/>
-              <a:buFontTx/>
-              <a:buNone/>
-              <a:defRPr/>
-            </a:pPr>
-            <a:endParaRPr kumimoji="0" lang="zh-CN" altLang="en-US" sz="1800" b="0" i="0" u="none" strike="noStrike" kern="1200" cap="none" spc="0" normalizeH="0" baseline="0" noProof="0" dirty="0">
-              <a:ln>
-                <a:noFill/>
-              </a:ln>
+            <a:pPr algn="ctr"/>
+            <a:r>
+              <a:rPr lang="zh-CN" altLang="en-US" dirty="0">
+                <a:solidFill>
+                  <a:schemeClr val="tx1"/>
+                </a:solidFill>
+              </a:rPr>
+              <a:t>教材对步骤图片</a:t>
+            </a:r>
+            <a:endParaRPr lang="zh-CN" altLang="en-US" dirty="0">
               <a:solidFill>
-                <a:prstClr val="white"/>
+                <a:schemeClr val="tx1"/>
               </a:solidFill>
-              <a:effectLst/>
-              <a:uLnTx/>
-              <a:uFillTx/>
-              <a:latin typeface="等线" panose="02010600030101010101" charset="-122"/>
-              <a:ea typeface="微软雅黑" panose="020B0503020204020204" pitchFamily="34" charset="-122"/>
-              <a:cs typeface="+mn-cs"/>
             </a:endParaRPr>
           </a:p>
         </p:txBody>
       </p:sp>
-      <p:grpSp>
-        <p:nvGrpSpPr>
-          <p:cNvPr id="7" name="组合 6"/>
-          <p:cNvGrpSpPr/>
-          <p:nvPr>
-            <p:custDataLst>
-              <p:tags r:id="rId2"/>
-            </p:custDataLst>
-          </p:nvPr>
-        </p:nvGrpSpPr>
-        <p:grpSpPr>
-          <a:xfrm>
-            <a:off x="7391459" y="2641172"/>
-            <a:ext cx="1892947" cy="1892947"/>
-            <a:chOff x="4536" y="4280"/>
-            <a:chExt cx="2980" cy="2980"/>
-          </a:xfrm>
-        </p:grpSpPr>
-        <p:sp>
-          <p:nvSpPr>
-            <p:cNvPr id="12" name="圆角矩形 34"/>
-            <p:cNvSpPr/>
-            <p:nvPr>
-              <p:custDataLst>
-                <p:tags r:id="rId3"/>
-              </p:custDataLst>
-            </p:nvPr>
-          </p:nvSpPr>
-          <p:spPr>
-            <a:xfrm rot="2700000">
-              <a:off x="4536" y="4280"/>
-              <a:ext cx="2980" cy="2980"/>
-            </a:xfrm>
-            <a:prstGeom prst="roundRect">
-              <a:avLst>
-                <a:gd name="adj" fmla="val 6319"/>
-              </a:avLst>
-            </a:prstGeom>
-            <a:solidFill>
-              <a:schemeClr val="bg1">
-                <a:lumMod val="95000"/>
-              </a:schemeClr>
-            </a:solidFill>
-            <a:ln>
-              <a:noFill/>
-            </a:ln>
-            <a:effectLst>
-              <a:outerShdw blurRad="152400" dist="63500" dir="8100000" algn="tl" rotWithShape="0">
-                <a:prstClr val="black">
-                  <a:alpha val="30000"/>
-                </a:prstClr>
-              </a:outerShdw>
-            </a:effectLst>
-            <a:scene3d>
-              <a:camera prst="orthographicFront"/>
-              <a:lightRig rig="threePt" dir="t"/>
-            </a:scene3d>
-            <a:sp3d prstMaterial="softEdge">
-              <a:bevelT w="38100" h="6350"/>
-            </a:sp3d>
-          </p:spPr>
-          <p:style>
-            <a:lnRef idx="2">
-              <a:schemeClr val="accent1">
-                <a:shade val="50000"/>
-              </a:schemeClr>
-            </a:lnRef>
-            <a:fillRef idx="1">
-              <a:schemeClr val="accent1"/>
-            </a:fillRef>
-            <a:effectRef idx="0">
-              <a:schemeClr val="accent1"/>
-            </a:effectRef>
-            <a:fontRef idx="minor">
-              <a:schemeClr val="lt1"/>
-            </a:fontRef>
-          </p:style>
-          <p:txBody>
-            <a:bodyPr rtlCol="0" anchor="ctr"/>
-            <a:lstStyle/>
-            <a:p>
-              <a:pPr marL="0" marR="0" lvl="0" indent="0" algn="ctr" defTabSz="914400" rtl="0" eaLnBrk="1" fontAlgn="auto" latinLnBrk="0" hangingPunct="1">
-                <a:lnSpc>
-                  <a:spcPct val="100000"/>
-                </a:lnSpc>
-                <a:spcBef>
-                  <a:spcPts val="0"/>
-                </a:spcBef>
-                <a:spcAft>
-                  <a:spcPts val="0"/>
-                </a:spcAft>
-                <a:buClrTx/>
-                <a:buSzTx/>
-                <a:buFontTx/>
-                <a:buNone/>
-                <a:defRPr/>
-              </a:pPr>
-              <a:endParaRPr kumimoji="0" lang="zh-CN" altLang="en-US" sz="2800" b="0" i="0" u="none" strike="noStrike" kern="1200" cap="none" spc="0" normalizeH="0" baseline="0" noProof="0" dirty="0">
-                <a:ln>
-                  <a:noFill/>
-                </a:ln>
-                <a:solidFill>
-                  <a:prstClr val="white"/>
-                </a:solidFill>
-                <a:effectLst/>
-                <a:uLnTx/>
-                <a:uFillTx/>
-                <a:latin typeface="DIN-BoldItalic" pitchFamily="50" charset="0"/>
-                <a:ea typeface="微软雅黑" panose="020B0503020204020204" pitchFamily="34" charset="-122"/>
-                <a:cs typeface="+mn-cs"/>
-              </a:endParaRPr>
-            </a:p>
-          </p:txBody>
-        </p:sp>
-        <p:sp>
-          <p:nvSpPr>
-            <p:cNvPr id="16" name="圆角矩形 38"/>
-            <p:cNvSpPr/>
-            <p:nvPr>
-              <p:custDataLst>
-                <p:tags r:id="rId4"/>
-              </p:custDataLst>
-            </p:nvPr>
-          </p:nvSpPr>
-          <p:spPr>
-            <a:xfrm rot="2700000">
-              <a:off x="4943" y="4671"/>
-              <a:ext cx="2185" cy="2185"/>
-            </a:xfrm>
-            <a:prstGeom prst="roundRect">
-              <a:avLst>
-                <a:gd name="adj" fmla="val 6319"/>
-              </a:avLst>
-            </a:prstGeom>
-            <a:solidFill>
-              <a:srgbClr val="0064D2"/>
-            </a:solidFill>
-            <a:ln>
-              <a:noFill/>
-            </a:ln>
-          </p:spPr>
-          <p:style>
-            <a:lnRef idx="2">
-              <a:schemeClr val="accent1">
-                <a:shade val="50000"/>
-              </a:schemeClr>
-            </a:lnRef>
-            <a:fillRef idx="1">
-              <a:schemeClr val="accent1"/>
-            </a:fillRef>
-            <a:effectRef idx="0">
-              <a:schemeClr val="accent1"/>
-            </a:effectRef>
-            <a:fontRef idx="minor">
-              <a:schemeClr val="lt1"/>
-            </a:fontRef>
-          </p:style>
-          <p:txBody>
-            <a:bodyPr rtlCol="0" anchor="ctr"/>
-            <a:lstStyle/>
-            <a:p>
-              <a:pPr marL="0" marR="0" lvl="0" indent="0" algn="ctr" defTabSz="914400" rtl="0" eaLnBrk="1" fontAlgn="auto" latinLnBrk="0" hangingPunct="1">
-                <a:lnSpc>
-                  <a:spcPct val="100000"/>
-                </a:lnSpc>
-                <a:spcBef>
-                  <a:spcPts val="0"/>
-                </a:spcBef>
-                <a:spcAft>
-                  <a:spcPts val="0"/>
-                </a:spcAft>
-                <a:buClrTx/>
-                <a:buSzTx/>
-                <a:buFontTx/>
-                <a:buNone/>
-                <a:defRPr/>
-              </a:pPr>
-              <a:endParaRPr kumimoji="0" lang="zh-CN" altLang="en-US" sz="1800" b="0" i="0" u="none" strike="noStrike" kern="1200" cap="none" spc="0" normalizeH="0" baseline="0" noProof="0" dirty="0">
-                <a:ln>
-                  <a:noFill/>
-                </a:ln>
-                <a:solidFill>
-                  <a:prstClr val="white"/>
-                </a:solidFill>
-                <a:effectLst/>
-                <a:uLnTx/>
-                <a:uFillTx/>
-                <a:latin typeface="等线" panose="02010600030101010101" charset="-122"/>
-                <a:ea typeface="微软雅黑" panose="020B0503020204020204" pitchFamily="34" charset="-122"/>
-                <a:cs typeface="+mn-cs"/>
-              </a:endParaRPr>
-            </a:p>
-          </p:txBody>
-        </p:sp>
-      </p:grpSp>
-      <p:sp>
-        <p:nvSpPr>
-          <p:cNvPr id="52" name="文本框1"/>
-          <p:cNvSpPr txBox="1"/>
-          <p:nvPr>
-            <p:custDataLst>
-              <p:tags r:id="rId5"/>
-            </p:custDataLst>
-          </p:nvPr>
-        </p:nvSpPr>
-        <p:spPr>
-          <a:xfrm>
-            <a:off x="6184076" y="5350373"/>
-            <a:ext cx="4320000" cy="460375"/>
-          </a:xfrm>
-          <a:prstGeom prst="rect">
-            <a:avLst/>
-          </a:prstGeom>
-          <a:noFill/>
-        </p:spPr>
-        <p:txBody>
-          <a:bodyPr wrap="square" rtlCol="0">
-            <a:spAutoFit/>
-          </a:bodyPr>
-          <a:lstStyle/>
-          <a:p>
-            <a:pPr lvl="0" algn="ctr">
-              <a:buClrTx/>
-              <a:buSzTx/>
-              <a:buFontTx/>
-            </a:pPr>
-            <a:r>
-              <a:rPr lang="zh-CN" sz="2400" b="1" dirty="0" smtClean="0">
-                <a:solidFill>
-                  <a:srgbClr val="0064D2"/>
-                </a:solidFill>
-                <a:cs typeface="+mn-ea"/>
-                <a:sym typeface="+mn-lt"/>
-              </a:rPr>
-              <a:t>二、会议纪要生成</a:t>
-            </a:r>
-            <a:endParaRPr lang="zh-CN" sz="2400" b="1" dirty="0" smtClean="0">
-              <a:solidFill>
-                <a:srgbClr val="0064D2"/>
-              </a:solidFill>
-              <a:cs typeface="+mn-ea"/>
-              <a:sym typeface="+mn-lt"/>
-            </a:endParaRPr>
-          </a:p>
-        </p:txBody>
-      </p:sp>
-      <p:sp>
-        <p:nvSpPr>
-          <p:cNvPr id="10" name="文本框 9"/>
-          <p:cNvSpPr txBox="1"/>
-          <p:nvPr>
-            <p:custDataLst>
-              <p:tags r:id="rId6"/>
-            </p:custDataLst>
-          </p:nvPr>
-        </p:nvSpPr>
-        <p:spPr>
-          <a:xfrm>
-            <a:off x="7981576" y="3119490"/>
-            <a:ext cx="682858" cy="1014730"/>
-          </a:xfrm>
-          <a:prstGeom prst="rect">
-            <a:avLst/>
-          </a:prstGeom>
-          <a:noFill/>
-        </p:spPr>
-        <p:txBody>
-          <a:bodyPr wrap="square" rtlCol="0">
-            <a:spAutoFit/>
-          </a:bodyPr>
-          <a:lstStyle/>
-          <a:p>
-            <a:r>
-              <a:rPr lang="en-US" altLang="zh-CN" sz="6000" b="1">
-                <a:solidFill>
-                  <a:schemeClr val="bg1"/>
-                </a:solidFill>
-                <a:latin typeface="+mj-ea"/>
-                <a:ea typeface="+mj-ea"/>
-              </a:rPr>
-              <a:t>2</a:t>
-            </a:r>
-            <a:endParaRPr lang="en-US" altLang="zh-CN" sz="6000" b="1">
-              <a:solidFill>
-                <a:schemeClr val="bg1"/>
-              </a:solidFill>
-              <a:latin typeface="+mj-ea"/>
-              <a:ea typeface="+mj-ea"/>
-            </a:endParaRPr>
-          </a:p>
-        </p:txBody>
-      </p:sp>
-      <p:sp>
-        <p:nvSpPr>
-          <p:cNvPr id="35" name="文本框 34"/>
+      <p:sp>
+        <p:nvSpPr>
+          <p:cNvPr id="2" name="文本框 1"/>
           <p:cNvSpPr txBox="1"/>
           <p:nvPr/>
         </p:nvSpPr>
         <p:spPr>
           <a:xfrm>
             <a:off x="0" y="793750"/>
-            <a:ext cx="1351262" cy="2061210"/>
+            <a:ext cx="1351262" cy="583565"/>
           </a:xfrm>
           <a:prstGeom prst="rect">
             <a:avLst/>
@@ -8981,7 +8406,7 @@
           <a:p>
             <a:pPr algn="ctr"/>
             <a:r>
-              <a:rPr lang="en-US" altLang="zh-CN" sz="3200" dirty="0" smtClean="0">
+              <a:rPr lang="en-US" sz="3200" dirty="0" smtClean="0">
                 <a:solidFill>
                   <a:srgbClr val="3F396C"/>
                 </a:solidFill>
@@ -8990,438 +8415,12 @@
               </a:rPr>
               <a:t>04</a:t>
             </a:r>
-            <a:endParaRPr lang="en-US" altLang="zh-CN" sz="3200" dirty="0" smtClean="0">
+            <a:endParaRPr lang="en-US" sz="3200" dirty="0" smtClean="0">
               <a:solidFill>
                 <a:srgbClr val="3F396C"/>
               </a:solidFill>
               <a:latin typeface="思源宋体" panose="02020700000000000000" charset="-122"/>
               <a:ea typeface="思源宋体" panose="02020700000000000000" charset="-122"/>
-            </a:endParaRPr>
-          </a:p>
-        </p:txBody>
-      </p:sp>
-      <p:sp>
-        <p:nvSpPr>
-          <p:cNvPr id="8" name="文本框1"/>
-          <p:cNvSpPr txBox="1"/>
-          <p:nvPr>
-            <p:custDataLst>
-              <p:tags r:id="rId7"/>
-            </p:custDataLst>
-          </p:nvPr>
-        </p:nvSpPr>
-        <p:spPr>
-          <a:xfrm>
-            <a:off x="1483995" y="5350510"/>
-            <a:ext cx="4320000" cy="460375"/>
-          </a:xfrm>
-          <a:prstGeom prst="rect">
-            <a:avLst/>
-          </a:prstGeom>
-          <a:noFill/>
-        </p:spPr>
-        <p:txBody>
-          <a:bodyPr wrap="square" rtlCol="0">
-            <a:spAutoFit/>
-          </a:bodyPr>
-          <a:lstStyle/>
-          <a:p>
-            <a:pPr marL="0" marR="0" lvl="0" indent="0" algn="ctr" defTabSz="914400" rtl="0" eaLnBrk="1" fontAlgn="auto" latinLnBrk="0" hangingPunct="1">
-              <a:lnSpc>
-                <a:spcPct val="100000"/>
-              </a:lnSpc>
-              <a:spcBef>
-                <a:spcPts val="0"/>
-              </a:spcBef>
-              <a:spcAft>
-                <a:spcPts val="0"/>
-              </a:spcAft>
-              <a:buClrTx/>
-              <a:buSzTx/>
-              <a:buFontTx/>
-              <a:buNone/>
-              <a:defRPr/>
-            </a:pPr>
-            <a:r>
-              <a:rPr lang="zh-CN" altLang="zh-CN" sz="2400" dirty="0" smtClean="0">
-                <a:solidFill>
-                  <a:schemeClr val="tx1"/>
-                </a:solidFill>
-                <a:latin typeface="微软雅黑" panose="020B0503020204020204" pitchFamily="34" charset="-122"/>
-                <a:ea typeface="微软雅黑" panose="020B0503020204020204" pitchFamily="34" charset="-122"/>
-                <a:sym typeface="+mn-ea"/>
-              </a:rPr>
-              <a:t>一、智能客服回复优化</a:t>
-            </a:r>
-            <a:endParaRPr lang="zh-CN" altLang="zh-CN" sz="2400" dirty="0" smtClean="0">
-              <a:solidFill>
-                <a:schemeClr val="tx1"/>
-              </a:solidFill>
-              <a:latin typeface="微软雅黑" panose="020B0503020204020204" pitchFamily="34" charset="-122"/>
-              <a:ea typeface="微软雅黑" panose="020B0503020204020204" pitchFamily="34" charset="-122"/>
-              <a:sym typeface="+mn-ea"/>
-            </a:endParaRPr>
-          </a:p>
-        </p:txBody>
-      </p:sp>
-      <p:grpSp>
-        <p:nvGrpSpPr>
-          <p:cNvPr id="2" name="组合 1"/>
-          <p:cNvGrpSpPr/>
-          <p:nvPr>
-            <p:custDataLst>
-              <p:tags r:id="rId8"/>
-            </p:custDataLst>
-          </p:nvPr>
-        </p:nvGrpSpPr>
-        <p:grpSpPr>
-          <a:xfrm>
-            <a:off x="2691210" y="2004060"/>
-            <a:ext cx="2087958" cy="2571359"/>
-            <a:chOff x="4536" y="3212"/>
-            <a:chExt cx="3287" cy="4048"/>
-          </a:xfrm>
-        </p:grpSpPr>
-        <p:sp>
-          <p:nvSpPr>
-            <p:cNvPr id="3" name="圆角矩形 34"/>
-            <p:cNvSpPr/>
-            <p:nvPr>
-              <p:custDataLst>
-                <p:tags r:id="rId9"/>
-              </p:custDataLst>
-            </p:nvPr>
-          </p:nvSpPr>
-          <p:spPr>
-            <a:xfrm rot="2700000">
-              <a:off x="4536" y="4280"/>
-              <a:ext cx="2980" cy="2980"/>
-            </a:xfrm>
-            <a:prstGeom prst="roundRect">
-              <a:avLst>
-                <a:gd name="adj" fmla="val 6319"/>
-              </a:avLst>
-            </a:prstGeom>
-            <a:solidFill>
-              <a:schemeClr val="bg1">
-                <a:lumMod val="95000"/>
-              </a:schemeClr>
-            </a:solidFill>
-            <a:ln>
-              <a:noFill/>
-            </a:ln>
-            <a:effectLst>
-              <a:outerShdw blurRad="152400" dist="63500" dir="8100000" algn="tl" rotWithShape="0">
-                <a:prstClr val="black">
-                  <a:alpha val="30000"/>
-                </a:prstClr>
-              </a:outerShdw>
-            </a:effectLst>
-            <a:scene3d>
-              <a:camera prst="orthographicFront"/>
-              <a:lightRig rig="threePt" dir="t"/>
-            </a:scene3d>
-            <a:sp3d prstMaterial="softEdge">
-              <a:bevelT w="38100" h="6350"/>
-            </a:sp3d>
-          </p:spPr>
-          <p:style>
-            <a:lnRef idx="2">
-              <a:schemeClr val="accent1">
-                <a:shade val="50000"/>
-              </a:schemeClr>
-            </a:lnRef>
-            <a:fillRef idx="1">
-              <a:schemeClr val="accent1"/>
-            </a:fillRef>
-            <a:effectRef idx="0">
-              <a:schemeClr val="accent1"/>
-            </a:effectRef>
-            <a:fontRef idx="minor">
-              <a:schemeClr val="lt1"/>
-            </a:fontRef>
-          </p:style>
-          <p:txBody>
-            <a:bodyPr rtlCol="0" anchor="ctr"/>
-            <a:lstStyle/>
-            <a:p>
-              <a:pPr marL="0" marR="0" lvl="0" indent="0" algn="ctr" defTabSz="914400" rtl="0" eaLnBrk="1" fontAlgn="auto" latinLnBrk="0" hangingPunct="1">
-                <a:lnSpc>
-                  <a:spcPct val="100000"/>
-                </a:lnSpc>
-                <a:spcBef>
-                  <a:spcPts val="0"/>
-                </a:spcBef>
-                <a:spcAft>
-                  <a:spcPts val="0"/>
-                </a:spcAft>
-                <a:buClrTx/>
-                <a:buSzTx/>
-                <a:buFontTx/>
-                <a:buNone/>
-                <a:defRPr/>
-              </a:pPr>
-              <a:endParaRPr kumimoji="0" lang="zh-CN" altLang="en-US" sz="2800" b="0" i="0" u="none" strike="noStrike" kern="1200" cap="none" spc="0" normalizeH="0" baseline="0" noProof="0" dirty="0">
-                <a:ln>
-                  <a:noFill/>
-                </a:ln>
-                <a:solidFill>
-                  <a:prstClr val="white"/>
-                </a:solidFill>
-                <a:effectLst/>
-                <a:uLnTx/>
-                <a:uFillTx/>
-                <a:latin typeface="DIN-BoldItalic" pitchFamily="50" charset="0"/>
-                <a:ea typeface="微软雅黑" panose="020B0503020204020204" pitchFamily="34" charset="-122"/>
-                <a:cs typeface="+mn-cs"/>
-              </a:endParaRPr>
-            </a:p>
-          </p:txBody>
-        </p:sp>
-        <p:sp>
-          <p:nvSpPr>
-            <p:cNvPr id="4" name="圆角矩形 38"/>
-            <p:cNvSpPr/>
-            <p:nvPr>
-              <p:custDataLst>
-                <p:tags r:id="rId10"/>
-              </p:custDataLst>
-            </p:nvPr>
-          </p:nvSpPr>
-          <p:spPr>
-            <a:xfrm rot="2700000">
-              <a:off x="4943" y="4671"/>
-              <a:ext cx="2185" cy="2185"/>
-            </a:xfrm>
-            <a:prstGeom prst="roundRect">
-              <a:avLst>
-                <a:gd name="adj" fmla="val 6319"/>
-              </a:avLst>
-            </a:prstGeom>
-            <a:solidFill>
-              <a:schemeClr val="tx1">
-                <a:lumMod val="65000"/>
-                <a:lumOff val="35000"/>
-              </a:schemeClr>
-            </a:solidFill>
-            <a:ln>
-              <a:noFill/>
-            </a:ln>
-          </p:spPr>
-          <p:style>
-            <a:lnRef idx="2">
-              <a:schemeClr val="accent1">
-                <a:shade val="50000"/>
-              </a:schemeClr>
-            </a:lnRef>
-            <a:fillRef idx="1">
-              <a:schemeClr val="accent1"/>
-            </a:fillRef>
-            <a:effectRef idx="0">
-              <a:schemeClr val="accent1"/>
-            </a:effectRef>
-            <a:fontRef idx="minor">
-              <a:schemeClr val="lt1"/>
-            </a:fontRef>
-          </p:style>
-          <p:txBody>
-            <a:bodyPr rtlCol="0" anchor="ctr"/>
-            <a:lstStyle/>
-            <a:p>
-              <a:pPr marL="0" marR="0" lvl="0" indent="0" algn="ctr" defTabSz="914400" rtl="0" eaLnBrk="1" fontAlgn="auto" latinLnBrk="0" hangingPunct="1">
-                <a:lnSpc>
-                  <a:spcPct val="100000"/>
-                </a:lnSpc>
-                <a:spcBef>
-                  <a:spcPts val="0"/>
-                </a:spcBef>
-                <a:spcAft>
-                  <a:spcPts val="0"/>
-                </a:spcAft>
-                <a:buClrTx/>
-                <a:buSzTx/>
-                <a:buFontTx/>
-                <a:buNone/>
-                <a:defRPr/>
-              </a:pPr>
-              <a:endParaRPr kumimoji="0" lang="zh-CN" altLang="en-US" sz="1800" b="0" i="0" u="none" strike="noStrike" kern="1200" cap="none" spc="0" normalizeH="0" baseline="0" noProof="0" dirty="0">
-                <a:ln>
-                  <a:noFill/>
-                </a:ln>
-                <a:solidFill>
-                  <a:schemeClr val="tx1">
-                    <a:lumMod val="75000"/>
-                    <a:lumOff val="25000"/>
-                  </a:schemeClr>
-                </a:solidFill>
-                <a:effectLst/>
-                <a:uLnTx/>
-                <a:uFillTx/>
-                <a:latin typeface="等线" panose="02010600030101010101" charset="-122"/>
-                <a:ea typeface="微软雅黑" panose="020B0503020204020204" pitchFamily="34" charset="-122"/>
-                <a:cs typeface="+mn-cs"/>
-              </a:endParaRPr>
-            </a:p>
-          </p:txBody>
-        </p:sp>
-        <p:sp>
-          <p:nvSpPr>
-            <p:cNvPr id="6" name="任意多边形 42"/>
-            <p:cNvSpPr/>
-            <p:nvPr>
-              <p:custDataLst>
-                <p:tags r:id="rId11"/>
-              </p:custDataLst>
-            </p:nvPr>
-          </p:nvSpPr>
-          <p:spPr>
-            <a:xfrm>
-              <a:off x="4767" y="3212"/>
-              <a:ext cx="3056" cy="1809"/>
-            </a:xfrm>
-            <a:custGeom>
-              <a:avLst/>
-              <a:gdLst>
-                <a:gd name="connsiteX0" fmla="*/ 0 w 1940313"/>
-                <a:gd name="connsiteY0" fmla="*/ 791737 h 1148576"/>
-                <a:gd name="connsiteX1" fmla="*/ 791737 w 1940313"/>
-                <a:gd name="connsiteY1" fmla="*/ 0 h 1148576"/>
-                <a:gd name="connsiteX2" fmla="*/ 1940313 w 1940313"/>
-                <a:gd name="connsiteY2" fmla="*/ 1148576 h 1148576"/>
-              </a:gdLst>
-              <a:ahLst/>
-              <a:cxnLst>
-                <a:cxn ang="0">
-                  <a:pos x="connsiteX0" y="connsiteY0"/>
-                </a:cxn>
-                <a:cxn ang="0">
-                  <a:pos x="connsiteX1" y="connsiteY1"/>
-                </a:cxn>
-                <a:cxn ang="0">
-                  <a:pos x="connsiteX2" y="connsiteY2"/>
-                </a:cxn>
-              </a:cxnLst>
-              <a:rect l="l" t="t" r="r" b="b"/>
-              <a:pathLst>
-                <a:path w="1940313" h="1148576">
-                  <a:moveTo>
-                    <a:pt x="0" y="791737"/>
-                  </a:moveTo>
-                  <a:lnTo>
-                    <a:pt x="791737" y="0"/>
-                  </a:lnTo>
-                  <a:lnTo>
-                    <a:pt x="1940313" y="1148576"/>
-                  </a:lnTo>
-                </a:path>
-              </a:pathLst>
-            </a:custGeom>
-            <a:noFill/>
-            <a:ln w="12700">
-              <a:solidFill>
-                <a:srgbClr val="8A8B8F"/>
-              </a:solidFill>
-              <a:prstDash val="dash"/>
-              <a:headEnd type="oval" w="med" len="med"/>
-              <a:tailEnd type="triangle" w="med" len="med"/>
-            </a:ln>
-          </p:spPr>
-          <p:style>
-            <a:lnRef idx="2">
-              <a:schemeClr val="accent1">
-                <a:shade val="50000"/>
-              </a:schemeClr>
-            </a:lnRef>
-            <a:fillRef idx="1">
-              <a:schemeClr val="accent1"/>
-            </a:fillRef>
-            <a:effectRef idx="0">
-              <a:schemeClr val="accent1"/>
-            </a:effectRef>
-            <a:fontRef idx="minor">
-              <a:schemeClr val="lt1"/>
-            </a:fontRef>
-          </p:style>
-          <p:txBody>
-            <a:bodyPr rtlCol="0" anchor="ctr"/>
-            <a:lstStyle/>
-            <a:p>
-              <a:pPr marL="0" marR="0" lvl="0" indent="0" algn="ctr" defTabSz="914400" rtl="0" eaLnBrk="1" fontAlgn="auto" latinLnBrk="0" hangingPunct="1">
-                <a:lnSpc>
-                  <a:spcPct val="100000"/>
-                </a:lnSpc>
-                <a:spcBef>
-                  <a:spcPts val="0"/>
-                </a:spcBef>
-                <a:spcAft>
-                  <a:spcPts val="0"/>
-                </a:spcAft>
-                <a:buClrTx/>
-                <a:buSzTx/>
-                <a:buFontTx/>
-                <a:buNone/>
-                <a:defRPr/>
-              </a:pPr>
-              <a:endParaRPr kumimoji="0" lang="zh-CN" altLang="en-US" sz="1800" b="0" i="0" u="none" strike="noStrike" kern="1200" cap="none" spc="0" normalizeH="0" baseline="0" noProof="0" dirty="0">
-                <a:ln>
-                  <a:noFill/>
-                </a:ln>
-                <a:solidFill>
-                  <a:prstClr val="white"/>
-                </a:solidFill>
-                <a:effectLst/>
-                <a:uLnTx/>
-                <a:uFillTx/>
-                <a:latin typeface="等线" panose="02010600030101010101" charset="-122"/>
-                <a:ea typeface="微软雅黑" panose="020B0503020204020204" pitchFamily="34" charset="-122"/>
-                <a:cs typeface="+mn-cs"/>
-              </a:endParaRPr>
-            </a:p>
-          </p:txBody>
-        </p:sp>
-      </p:grpSp>
-      <p:sp>
-        <p:nvSpPr>
-          <p:cNvPr id="9" name="文本框 8"/>
-          <p:cNvSpPr txBox="1"/>
-          <p:nvPr>
-            <p:custDataLst>
-              <p:tags r:id="rId12"/>
-            </p:custDataLst>
-          </p:nvPr>
-        </p:nvSpPr>
-        <p:spPr>
-          <a:xfrm>
-            <a:off x="3281327" y="3153168"/>
-            <a:ext cx="682858" cy="1014730"/>
-          </a:xfrm>
-          <a:prstGeom prst="rect">
-            <a:avLst/>
-          </a:prstGeom>
-          <a:noFill/>
-        </p:spPr>
-        <p:txBody>
-          <a:bodyPr wrap="square" rtlCol="0">
-            <a:spAutoFit/>
-          </a:bodyPr>
-          <a:lstStyle/>
-          <a:p>
-            <a:r>
-              <a:rPr lang="en-US" altLang="zh-CN" sz="6000" b="1">
-                <a:solidFill>
-                  <a:schemeClr val="bg1"/>
-                </a:solidFill>
-                <a:latin typeface="+mj-ea"/>
-                <a:ea typeface="+mj-ea"/>
-              </a:rPr>
-              <a:t>1</a:t>
-            </a:r>
-            <a:endParaRPr lang="en-US" altLang="zh-CN" sz="6000" b="1">
-              <a:solidFill>
-                <a:schemeClr val="bg1"/>
-              </a:solidFill>
-              <a:latin typeface="+mj-ea"/>
-              <a:ea typeface="+mj-ea"/>
             </a:endParaRPr>
           </a:p>
         </p:txBody>
@@ -9495,7 +8494,7 @@
               <a:defRPr/>
             </a:pPr>
             <a:r>
-              <a:rPr lang="zh-CN" altLang="zh-CN" b="1" dirty="0">
+              <a:rPr lang="zh-CN" altLang="en-US" b="1" dirty="0">
                 <a:solidFill>
                   <a:schemeClr val="accent1">
                     <a:lumMod val="75000"/>
@@ -9506,9 +8505,23 @@
                 <a:cs typeface="微软雅黑" panose="020B0503020204020204" pitchFamily="34" charset="-122"/>
                 <a:sym typeface="+mn-lt"/>
               </a:rPr>
-              <a:t>任务实施</a:t>
-            </a:r>
-            <a:endParaRPr lang="zh-CN" altLang="zh-CN" b="1" dirty="0">
+              <a:t>任务</a:t>
+            </a:r>
+            <a:r>
+              <a:rPr lang="zh-CN" altLang="en-US" b="1" dirty="0">
+                <a:solidFill>
+                  <a:schemeClr val="accent1">
+                    <a:lumMod val="75000"/>
+                  </a:schemeClr>
+                </a:solidFill>
+                <a:latin typeface="微软雅黑" panose="020B0503020204020204" pitchFamily="34" charset="-122"/>
+                <a:ea typeface="微软雅黑" panose="020B0503020204020204" pitchFamily="34" charset="-122"/>
+                <a:cs typeface="微软雅黑" panose="020B0503020204020204" pitchFamily="34" charset="-122"/>
+                <a:sym typeface="+mn-lt"/>
+              </a:rPr>
+              <a:t>实施</a:t>
+            </a:r>
+            <a:endParaRPr lang="zh-CN" altLang="en-US" b="1" dirty="0">
               <a:solidFill>
                 <a:schemeClr val="accent1">
                   <a:lumMod val="75000"/>
@@ -9530,7 +8543,7 @@
 </p:sld>
 </file>
 
-<file path=ppt/slides/slide5.xml><?xml version="1.0" encoding="utf-8"?>
+<file path=ppt/slides/slide3.xml><?xml version="1.0" encoding="utf-8"?>
 <p:sld xmlns:a="http://schemas.openxmlformats.org/drawingml/2006/main" xmlns:r="http://schemas.openxmlformats.org/officeDocument/2006/relationships" xmlns:p="http://schemas.openxmlformats.org/presentationml/2006/main">
   <p:cSld>
     <p:spTree>
@@ -9555,8 +8568,8 @@
         </p:nvSpPr>
         <p:spPr>
           <a:xfrm>
-            <a:off x="1175385" y="1377315"/>
-            <a:ext cx="9841230" cy="2282190"/>
+            <a:off x="155575" y="1777365"/>
+            <a:ext cx="5502275" cy="4629150"/>
           </a:xfrm>
           <a:prstGeom prst="rect">
             <a:avLst/>
@@ -9580,7 +8593,7 @@
                 <a:ea typeface="微软雅黑" panose="020B0503020204020204" pitchFamily="34" charset="-122"/>
                 <a:cs typeface="微软雅黑" panose="020B0503020204020204" pitchFamily="34" charset="-122"/>
               </a:rPr>
-              <a:t>某项目组希望让</a:t>
+              <a:t>该表格包含多个关键字段，每个字段都有明确的含义。其中，</a:t>
             </a:r>
             <a:r>
               <a:rPr lang="en-US" altLang="zh-CN" dirty="0" smtClean="0">
@@ -9588,7 +8601,7 @@
                 <a:ea typeface="微软雅黑" panose="020B0503020204020204" pitchFamily="34" charset="-122"/>
                 <a:cs typeface="微软雅黑" panose="020B0503020204020204" pitchFamily="34" charset="-122"/>
               </a:rPr>
-              <a:t>Agent</a:t>
+              <a:t>“country”</a:t>
             </a:r>
             <a:r>
               <a:rPr lang="zh-CN" altLang="en-US" dirty="0" smtClean="0">
@@ -9596,7 +8609,7 @@
                 <a:ea typeface="微软雅黑" panose="020B0503020204020204" pitchFamily="34" charset="-122"/>
                 <a:cs typeface="微软雅黑" panose="020B0503020204020204" pitchFamily="34" charset="-122"/>
               </a:rPr>
-              <a:t>根据会议内容自动生成纪要，这一案例的核心目的并非仅仅展示如何实现自动化，而是引导大家理解在与智能体沟通时，</a:t>
+              <a:t>字段代表国家或地区名称；</a:t>
             </a:r>
             <a:r>
               <a:rPr lang="en-US" altLang="zh-CN" dirty="0" smtClean="0">
@@ -9604,7 +8617,7 @@
                 <a:ea typeface="微软雅黑" panose="020B0503020204020204" pitchFamily="34" charset="-122"/>
                 <a:cs typeface="微软雅黑" panose="020B0503020204020204" pitchFamily="34" charset="-122"/>
               </a:rPr>
-              <a:t>“</a:t>
+              <a:t>“code”</a:t>
             </a:r>
             <a:r>
               <a:rPr lang="zh-CN" altLang="en-US" dirty="0" smtClean="0">
@@ -9612,7 +8625,7 @@
                 <a:ea typeface="微软雅黑" panose="020B0503020204020204" pitchFamily="34" charset="-122"/>
                 <a:cs typeface="微软雅黑" panose="020B0503020204020204" pitchFamily="34" charset="-122"/>
               </a:rPr>
-              <a:t>怎么说</a:t>
+              <a:t>是三位国家代码；</a:t>
             </a:r>
             <a:r>
               <a:rPr lang="en-US" altLang="zh-CN" dirty="0" smtClean="0">
@@ -9620,7 +8633,7 @@
                 <a:ea typeface="微软雅黑" panose="020B0503020204020204" pitchFamily="34" charset="-122"/>
                 <a:cs typeface="微软雅黑" panose="020B0503020204020204" pitchFamily="34" charset="-122"/>
               </a:rPr>
-              <a:t>”</a:t>
+              <a:t>“region”</a:t>
             </a:r>
             <a:r>
               <a:rPr lang="zh-CN" altLang="en-US" dirty="0" smtClean="0">
@@ -9628,7 +8641,7 @@
                 <a:ea typeface="微软雅黑" panose="020B0503020204020204" pitchFamily="34" charset="-122"/>
                 <a:cs typeface="微软雅黑" panose="020B0503020204020204" pitchFamily="34" charset="-122"/>
               </a:rPr>
-              <a:t>比</a:t>
+              <a:t>表示该国家所属的区域；</a:t>
             </a:r>
             <a:r>
               <a:rPr lang="en-US" altLang="zh-CN" dirty="0" smtClean="0">
@@ -9636,7 +8649,7 @@
                 <a:ea typeface="微软雅黑" panose="020B0503020204020204" pitchFamily="34" charset="-122"/>
                 <a:cs typeface="微软雅黑" panose="020B0503020204020204" pitchFamily="34" charset="-122"/>
               </a:rPr>
-              <a:t>“</a:t>
+              <a:t>“year”</a:t>
             </a:r>
             <a:r>
               <a:rPr lang="zh-CN" altLang="en-US" dirty="0" smtClean="0">
@@ -9644,7 +8657,7 @@
                 <a:ea typeface="微软雅黑" panose="020B0503020204020204" pitchFamily="34" charset="-122"/>
                 <a:cs typeface="微软雅黑" panose="020B0503020204020204" pitchFamily="34" charset="-122"/>
               </a:rPr>
-              <a:t>说什么</a:t>
+              <a:t>字段记录数据对应的年份；</a:t>
             </a:r>
             <a:r>
               <a:rPr lang="en-US" altLang="zh-CN" dirty="0" smtClean="0">
@@ -9652,7 +8665,7 @@
                 <a:ea typeface="微软雅黑" panose="020B0503020204020204" pitchFamily="34" charset="-122"/>
                 <a:cs typeface="微软雅黑" panose="020B0503020204020204" pitchFamily="34" charset="-122"/>
               </a:rPr>
-              <a:t>”</a:t>
+              <a:t>“ev_sales”</a:t>
             </a:r>
             <a:r>
               <a:rPr lang="zh-CN" altLang="en-US" dirty="0" smtClean="0">
@@ -9660,7 +8673,7 @@
                 <a:ea typeface="微软雅黑" panose="020B0503020204020204" pitchFamily="34" charset="-122"/>
                 <a:cs typeface="微软雅黑" panose="020B0503020204020204" pitchFamily="34" charset="-122"/>
               </a:rPr>
-              <a:t>更重要。用户的意图</a:t>
+              <a:t>指新能源汽车的销量；</a:t>
             </a:r>
             <a:r>
               <a:rPr lang="en-US" altLang="zh-CN" dirty="0" smtClean="0">
@@ -9668,7 +8681,7 @@
                 <a:ea typeface="微软雅黑" panose="020B0503020204020204" pitchFamily="34" charset="-122"/>
                 <a:cs typeface="微软雅黑" panose="020B0503020204020204" pitchFamily="34" charset="-122"/>
               </a:rPr>
-              <a:t>“</a:t>
+              <a:t>“ev_sales_share”</a:t>
             </a:r>
             <a:r>
               <a:rPr lang="zh-CN" altLang="en-US" dirty="0" smtClean="0">
@@ -9676,7 +8689,7 @@
                 <a:ea typeface="微软雅黑" panose="020B0503020204020204" pitchFamily="34" charset="-122"/>
                 <a:cs typeface="微软雅黑" panose="020B0503020204020204" pitchFamily="34" charset="-122"/>
               </a:rPr>
-              <a:t>帮我总结会议</a:t>
+              <a:t>表示新能源汽车销量占当年新车总销量的百分比，在本案例样本中，该字段直接采用百分比数值表示，例如字段值</a:t>
             </a:r>
             <a:r>
               <a:rPr lang="en-US" altLang="zh-CN" dirty="0" smtClean="0">
@@ -9684,7 +8697,7 @@
                 <a:ea typeface="微软雅黑" panose="020B0503020204020204" pitchFamily="34" charset="-122"/>
                 <a:cs typeface="微软雅黑" panose="020B0503020204020204" pitchFamily="34" charset="-122"/>
               </a:rPr>
-              <a:t>”</a:t>
+              <a:t>38</a:t>
             </a:r>
             <a:r>
               <a:rPr lang="zh-CN" altLang="en-US" dirty="0" smtClean="0">
@@ -9692,7 +8705,39 @@
                 <a:ea typeface="微软雅黑" panose="020B0503020204020204" pitchFamily="34" charset="-122"/>
                 <a:cs typeface="微软雅黑" panose="020B0503020204020204" pitchFamily="34" charset="-122"/>
               </a:rPr>
-              <a:t>看似简单，但在实际业务中，往往还需要区分决议、待办事项和责任人等关键信息。如果提示词过于简单，智能体可能只会生成一段摘要，而无法输出结构化的协作结果。因此，我们需要通过设计更精细的提示词，来引导大模型按照业务需求进行格式化总结。</a:t>
+              <a:t>即代表</a:t>
+            </a:r>
+            <a:r>
+              <a:rPr lang="en-US" altLang="zh-CN" dirty="0" smtClean="0">
+                <a:latin typeface="微软雅黑" panose="020B0503020204020204" pitchFamily="34" charset="-122"/>
+                <a:ea typeface="微软雅黑" panose="020B0503020204020204" pitchFamily="34" charset="-122"/>
+                <a:cs typeface="微软雅黑" panose="020B0503020204020204" pitchFamily="34" charset="-122"/>
+              </a:rPr>
+              <a:t>38%</a:t>
+            </a:r>
+            <a:r>
+              <a:rPr lang="zh-CN" altLang="en-US" dirty="0" smtClean="0">
+                <a:latin typeface="微软雅黑" panose="020B0503020204020204" pitchFamily="34" charset="-122"/>
+                <a:ea typeface="微软雅黑" panose="020B0503020204020204" pitchFamily="34" charset="-122"/>
+                <a:cs typeface="微软雅黑" panose="020B0503020204020204" pitchFamily="34" charset="-122"/>
+              </a:rPr>
+              <a:t>；</a:t>
+            </a:r>
+            <a:r>
+              <a:rPr lang="en-US" altLang="zh-CN" dirty="0" smtClean="0">
+                <a:latin typeface="微软雅黑" panose="020B0503020204020204" pitchFamily="34" charset="-122"/>
+                <a:ea typeface="微软雅黑" panose="020B0503020204020204" pitchFamily="34" charset="-122"/>
+                <a:cs typeface="微软雅黑" panose="020B0503020204020204" pitchFamily="34" charset="-122"/>
+              </a:rPr>
+              <a:t>“ev_stock”</a:t>
+            </a:r>
+            <a:r>
+              <a:rPr lang="zh-CN" altLang="en-US" dirty="0" smtClean="0">
+                <a:latin typeface="微软雅黑" panose="020B0503020204020204" pitchFamily="34" charset="-122"/>
+                <a:ea typeface="微软雅黑" panose="020B0503020204020204" pitchFamily="34" charset="-122"/>
+                <a:cs typeface="微软雅黑" panose="020B0503020204020204" pitchFamily="34" charset="-122"/>
+              </a:rPr>
+              <a:t>则记录了新能源汽车的保有量。此外，表格还包含了数据来源名称、来源链接以及许可说明等信息，确保了数据的可追溯性和合规性。</a:t>
             </a:r>
             <a:endParaRPr lang="zh-CN" altLang="en-US" dirty="0" smtClean="0">
               <a:latin typeface="微软雅黑" panose="020B0503020204020204" pitchFamily="34" charset="-122"/>
@@ -9710,8 +8755,8 @@
         </p:nvSpPr>
         <p:spPr>
           <a:xfrm>
-            <a:off x="1954896" y="3657124"/>
-            <a:ext cx="8211454" cy="2991484"/>
+            <a:off x="5797550" y="1776888"/>
+            <a:ext cx="5911850" cy="4630261"/>
           </a:xfrm>
           <a:prstGeom prst="rect">
             <a:avLst/>
@@ -9740,7 +8785,7 @@
           <a:p>
             <a:pPr algn="ctr"/>
             <a:r>
-              <a:rPr lang="zh-CN" altLang="en-US" dirty="0">
+              <a:rPr lang="zh-CN" altLang="en-US" dirty="0" smtClean="0">
                 <a:solidFill>
                   <a:schemeClr val="tx1"/>
                 </a:solidFill>
@@ -9757,7 +8802,7 @@
       </p:sp>
       <p:sp>
         <p:nvSpPr>
-          <p:cNvPr id="2" name="文本框 1"/>
+          <p:cNvPr id="4" name="文本框 3"/>
           <p:cNvSpPr txBox="1"/>
           <p:nvPr/>
         </p:nvSpPr>
@@ -9921,7 +8966,7 @@
 </p:sld>
 </file>
 
-<file path=ppt/slides/slide6.xml><?xml version="1.0" encoding="utf-8"?>
+<file path=ppt/slides/slide4.xml><?xml version="1.0" encoding="utf-8"?>
 <p:sld xmlns:a="http://schemas.openxmlformats.org/drawingml/2006/main" xmlns:r="http://schemas.openxmlformats.org/officeDocument/2006/relationships" xmlns:p="http://schemas.openxmlformats.org/presentationml/2006/main">
   <p:cSld>
     <p:spTree>
@@ -9946,8 +8991,8 @@
         </p:nvSpPr>
         <p:spPr>
           <a:xfrm>
-            <a:off x="155575" y="1777365"/>
-            <a:ext cx="5502275" cy="4629150"/>
+            <a:off x="1175385" y="1377315"/>
+            <a:ext cx="9841230" cy="2282190"/>
           </a:xfrm>
           <a:prstGeom prst="rect">
             <a:avLst/>
@@ -9971,7 +9016,7 @@
                 <a:ea typeface="微软雅黑" panose="020B0503020204020204" pitchFamily="34" charset="-122"/>
                 <a:cs typeface="微软雅黑" panose="020B0503020204020204" pitchFamily="34" charset="-122"/>
               </a:rPr>
-              <a:t>在构建系统提示词时，需要明确告知大模型用什么样的格式进行总结。例如，</a:t>
+              <a:t>在</a:t>
             </a:r>
             <a:r>
               <a:rPr lang="en-US" altLang="zh-CN" dirty="0" smtClean="0">
@@ -9979,7 +9024,7 @@
                 <a:ea typeface="微软雅黑" panose="020B0503020204020204" pitchFamily="34" charset="-122"/>
                 <a:cs typeface="微软雅黑" panose="020B0503020204020204" pitchFamily="34" charset="-122"/>
               </a:rPr>
-              <a:t>V1</a:t>
+              <a:t>RAGFlow</a:t>
             </a:r>
             <a:r>
               <a:rPr lang="zh-CN" altLang="en-US" dirty="0" smtClean="0">
@@ -9987,7 +9032,7 @@
                 <a:ea typeface="微软雅黑" panose="020B0503020204020204" pitchFamily="34" charset="-122"/>
                 <a:cs typeface="微软雅黑" panose="020B0503020204020204" pitchFamily="34" charset="-122"/>
               </a:rPr>
-              <a:t>版提示词可能只是简单要求</a:t>
+              <a:t>中搭建一个智能体工作流，核心目标是允许用户在流程开始时上传文件。首先，需要新建一个智能体工作流，并将开始节点的模式设置为</a:t>
             </a:r>
             <a:r>
               <a:rPr lang="en-US" altLang="zh-CN" dirty="0" smtClean="0">
@@ -10003,7 +9048,7 @@
                 <a:ea typeface="微软雅黑" panose="020B0503020204020204" pitchFamily="34" charset="-122"/>
                 <a:cs typeface="微软雅黑" panose="020B0503020204020204" pitchFamily="34" charset="-122"/>
               </a:rPr>
-              <a:t>总结会议内容</a:t>
+              <a:t>任务模式</a:t>
             </a:r>
             <a:r>
               <a:rPr lang="en-US" altLang="zh-CN" dirty="0" smtClean="0">
@@ -10019,7 +9064,7 @@
                 <a:ea typeface="微软雅黑" panose="020B0503020204020204" pitchFamily="34" charset="-122"/>
                 <a:cs typeface="微软雅黑" panose="020B0503020204020204" pitchFamily="34" charset="-122"/>
               </a:rPr>
-              <a:t>，而</a:t>
+              <a:t>。在开始节点中，可以看到</a:t>
             </a:r>
             <a:r>
               <a:rPr lang="en-US" altLang="zh-CN" dirty="0" smtClean="0">
@@ -10027,7 +9072,7 @@
                 <a:ea typeface="微软雅黑" panose="020B0503020204020204" pitchFamily="34" charset="-122"/>
                 <a:cs typeface="微软雅黑" panose="020B0503020204020204" pitchFamily="34" charset="-122"/>
               </a:rPr>
-              <a:t>V2</a:t>
+              <a:t>“</a:t>
             </a:r>
             <a:r>
               <a:rPr lang="zh-CN" altLang="en-US" dirty="0" smtClean="0">
@@ -10035,7 +9080,103 @@
                 <a:ea typeface="微软雅黑" panose="020B0503020204020204" pitchFamily="34" charset="-122"/>
                 <a:cs typeface="微软雅黑" panose="020B0503020204020204" pitchFamily="34" charset="-122"/>
               </a:rPr>
-              <a:t>版提示词则会具体指定输出格式，包括决议、待办事项、责任人和截止时间等字段。通过分别运行两组关键词，可以观察模型是否会漏掉责任人和时间节点等细节。将结果与其他同学的运行结果对比，可以明显看出提示词设计对输出质量的影响。</a:t>
+              <a:t>输入</a:t>
+            </a:r>
+            <a:r>
+              <a:rPr lang="en-US" altLang="zh-CN" dirty="0" smtClean="0">
+                <a:latin typeface="微软雅黑" panose="020B0503020204020204" pitchFamily="34" charset="-122"/>
+                <a:ea typeface="微软雅黑" panose="020B0503020204020204" pitchFamily="34" charset="-122"/>
+                <a:cs typeface="微软雅黑" panose="020B0503020204020204" pitchFamily="34" charset="-122"/>
+              </a:rPr>
+              <a:t>”</a:t>
+            </a:r>
+            <a:r>
+              <a:rPr lang="zh-CN" altLang="en-US" dirty="0" smtClean="0">
+                <a:latin typeface="微软雅黑" panose="020B0503020204020204" pitchFamily="34" charset="-122"/>
+                <a:ea typeface="微软雅黑" panose="020B0503020204020204" pitchFamily="34" charset="-122"/>
+                <a:cs typeface="微软雅黑" panose="020B0503020204020204" pitchFamily="34" charset="-122"/>
+              </a:rPr>
+              <a:t>区域，这是流程启动前需要用户提供信息的地方。点击加号添加变量，在</a:t>
+            </a:r>
+            <a:r>
+              <a:rPr lang="en-US" altLang="zh-CN" dirty="0" smtClean="0">
+                <a:latin typeface="微软雅黑" panose="020B0503020204020204" pitchFamily="34" charset="-122"/>
+                <a:ea typeface="微软雅黑" panose="020B0503020204020204" pitchFamily="34" charset="-122"/>
+                <a:cs typeface="微软雅黑" panose="020B0503020204020204" pitchFamily="34" charset="-122"/>
+              </a:rPr>
+              <a:t>“</a:t>
+            </a:r>
+            <a:r>
+              <a:rPr lang="zh-CN" altLang="en-US" dirty="0" smtClean="0">
+                <a:latin typeface="微软雅黑" panose="020B0503020204020204" pitchFamily="34" charset="-122"/>
+                <a:ea typeface="微软雅黑" panose="020B0503020204020204" pitchFamily="34" charset="-122"/>
+                <a:cs typeface="微软雅黑" panose="020B0503020204020204" pitchFamily="34" charset="-122"/>
+              </a:rPr>
+              <a:t>类型</a:t>
+            </a:r>
+            <a:r>
+              <a:rPr lang="en-US" altLang="zh-CN" dirty="0" smtClean="0">
+                <a:latin typeface="微软雅黑" panose="020B0503020204020204" pitchFamily="34" charset="-122"/>
+                <a:ea typeface="微软雅黑" panose="020B0503020204020204" pitchFamily="34" charset="-122"/>
+                <a:cs typeface="微软雅黑" panose="020B0503020204020204" pitchFamily="34" charset="-122"/>
+              </a:rPr>
+              <a:t>”</a:t>
+            </a:r>
+            <a:r>
+              <a:rPr lang="zh-CN" altLang="en-US" dirty="0" smtClean="0">
+                <a:latin typeface="微软雅黑" panose="020B0503020204020204" pitchFamily="34" charset="-122"/>
+                <a:ea typeface="微软雅黑" panose="020B0503020204020204" pitchFamily="34" charset="-122"/>
+                <a:cs typeface="微软雅黑" panose="020B0503020204020204" pitchFamily="34" charset="-122"/>
+              </a:rPr>
+              <a:t>中选择</a:t>
+            </a:r>
+            <a:r>
+              <a:rPr lang="en-US" altLang="zh-CN" dirty="0" smtClean="0">
+                <a:latin typeface="微软雅黑" panose="020B0503020204020204" pitchFamily="34" charset="-122"/>
+                <a:ea typeface="微软雅黑" panose="020B0503020204020204" pitchFamily="34" charset="-122"/>
+                <a:cs typeface="微软雅黑" panose="020B0503020204020204" pitchFamily="34" charset="-122"/>
+              </a:rPr>
+              <a:t>“</a:t>
+            </a:r>
+            <a:r>
+              <a:rPr lang="zh-CN" altLang="en-US" dirty="0" smtClean="0">
+                <a:latin typeface="微软雅黑" panose="020B0503020204020204" pitchFamily="34" charset="-122"/>
+                <a:ea typeface="微软雅黑" panose="020B0503020204020204" pitchFamily="34" charset="-122"/>
+                <a:cs typeface="微软雅黑" panose="020B0503020204020204" pitchFamily="34" charset="-122"/>
+              </a:rPr>
+              <a:t>文件</a:t>
+            </a:r>
+            <a:r>
+              <a:rPr lang="en-US" altLang="zh-CN" dirty="0" smtClean="0">
+                <a:latin typeface="微软雅黑" panose="020B0503020204020204" pitchFamily="34" charset="-122"/>
+                <a:ea typeface="微软雅黑" panose="020B0503020204020204" pitchFamily="34" charset="-122"/>
+                <a:cs typeface="微软雅黑" panose="020B0503020204020204" pitchFamily="34" charset="-122"/>
+              </a:rPr>
+              <a:t>”</a:t>
+            </a:r>
+            <a:r>
+              <a:rPr lang="zh-CN" altLang="en-US" dirty="0" smtClean="0">
+                <a:latin typeface="微软雅黑" panose="020B0503020204020204" pitchFamily="34" charset="-122"/>
+                <a:ea typeface="微软雅黑" panose="020B0503020204020204" pitchFamily="34" charset="-122"/>
+                <a:cs typeface="微软雅黑" panose="020B0503020204020204" pitchFamily="34" charset="-122"/>
+              </a:rPr>
+              <a:t>，并将键和名称都设置为</a:t>
+            </a:r>
+            <a:r>
+              <a:rPr lang="en-US" altLang="zh-CN" dirty="0" smtClean="0">
+                <a:latin typeface="微软雅黑" panose="020B0503020204020204" pitchFamily="34" charset="-122"/>
+                <a:ea typeface="微软雅黑" panose="020B0503020204020204" pitchFamily="34" charset="-122"/>
+                <a:cs typeface="微软雅黑" panose="020B0503020204020204" pitchFamily="34" charset="-122"/>
+              </a:rPr>
+              <a:t>“csv_file”</a:t>
+            </a:r>
+            <a:r>
+              <a:rPr lang="zh-CN" altLang="en-US" dirty="0" smtClean="0">
+                <a:latin typeface="微软雅黑" panose="020B0503020204020204" pitchFamily="34" charset="-122"/>
+                <a:ea typeface="微软雅黑" panose="020B0503020204020204" pitchFamily="34" charset="-122"/>
+                <a:cs typeface="微软雅黑" panose="020B0503020204020204" pitchFamily="34" charset="-122"/>
+              </a:rPr>
+              <a:t>，确认后即可成功添加一个用于接收上传文件的变量。</a:t>
             </a:r>
             <a:endParaRPr lang="zh-CN" altLang="en-US" dirty="0" smtClean="0">
               <a:latin typeface="微软雅黑" panose="020B0503020204020204" pitchFamily="34" charset="-122"/>
@@ -10053,8 +9194,8 @@
         </p:nvSpPr>
         <p:spPr>
           <a:xfrm>
-            <a:off x="5797550" y="1776888"/>
-            <a:ext cx="5911850" cy="4630261"/>
+            <a:off x="1954896" y="3657124"/>
+            <a:ext cx="8211454" cy="2991484"/>
           </a:xfrm>
           <a:prstGeom prst="rect">
             <a:avLst/>
@@ -10083,7 +9224,7 @@
           <a:p>
             <a:pPr algn="ctr"/>
             <a:r>
-              <a:rPr lang="zh-CN" altLang="en-US" dirty="0" smtClean="0">
+              <a:rPr lang="zh-CN" altLang="en-US" dirty="0">
                 <a:solidFill>
                   <a:schemeClr val="tx1"/>
                 </a:solidFill>
@@ -10100,7 +9241,7 @@
       </p:sp>
       <p:sp>
         <p:nvSpPr>
-          <p:cNvPr id="4" name="文本框 3"/>
+          <p:cNvPr id="2" name="文本框 1"/>
           <p:cNvSpPr txBox="1"/>
           <p:nvPr/>
         </p:nvSpPr>
@@ -10264,6 +9405,644 @@
 </p:sld>
 </file>
 
+<file path=ppt/slides/slide5.xml><?xml version="1.0" encoding="utf-8"?>
+<p:sld xmlns:a="http://schemas.openxmlformats.org/drawingml/2006/main" xmlns:r="http://schemas.openxmlformats.org/officeDocument/2006/relationships" xmlns:p="http://schemas.openxmlformats.org/presentationml/2006/main">
+  <p:cSld>
+    <p:spTree>
+      <p:nvGrpSpPr>
+        <p:cNvPr id="1" name=""/>
+        <p:cNvGrpSpPr/>
+        <p:nvPr/>
+      </p:nvGrpSpPr>
+      <p:grpSpPr>
+        <a:xfrm>
+          <a:off x="0" y="0"/>
+          <a:ext cx="0" cy="0"/>
+          <a:chOff x="0" y="0"/>
+          <a:chExt cx="0" cy="0"/>
+        </a:xfrm>
+      </p:grpSpPr>
+      <p:sp>
+        <p:nvSpPr>
+          <p:cNvPr id="3" name="文本框 2"/>
+          <p:cNvSpPr txBox="1"/>
+          <p:nvPr/>
+        </p:nvSpPr>
+        <p:spPr>
+          <a:xfrm>
+            <a:off x="155575" y="1777365"/>
+            <a:ext cx="5502275" cy="4629150"/>
+          </a:xfrm>
+          <a:prstGeom prst="rect">
+            <a:avLst/>
+          </a:prstGeom>
+          <a:noFill/>
+        </p:spPr>
+        <p:txBody>
+          <a:bodyPr wrap="square" rtlCol="0" anchor="t">
+            <a:noAutofit/>
+          </a:bodyPr>
+          <a:lstStyle/>
+          <a:p>
+            <a:pPr indent="457200" fontAlgn="auto">
+              <a:lnSpc>
+                <a:spcPct val="150000"/>
+              </a:lnSpc>
+            </a:pPr>
+            <a:r>
+              <a:rPr lang="zh-CN" dirty="0" smtClean="0">
+                <a:latin typeface="微软雅黑" panose="020B0503020204020204" pitchFamily="34" charset="-122"/>
+                <a:ea typeface="微软雅黑" panose="020B0503020204020204" pitchFamily="34" charset="-122"/>
+                <a:cs typeface="微软雅黑" panose="020B0503020204020204" pitchFamily="34" charset="-122"/>
+              </a:rPr>
+              <a:t>为了验证文件上传功能，可以在回复节点中直接添加该</a:t>
+            </a:r>
+            <a:r>
+              <a:rPr lang="en-US" altLang="zh-CN" dirty="0" smtClean="0">
+                <a:latin typeface="微软雅黑" panose="020B0503020204020204" pitchFamily="34" charset="-122"/>
+                <a:ea typeface="微软雅黑" panose="020B0503020204020204" pitchFamily="34" charset="-122"/>
+                <a:cs typeface="微软雅黑" panose="020B0503020204020204" pitchFamily="34" charset="-122"/>
+              </a:rPr>
+              <a:t>csv_file</a:t>
+            </a:r>
+            <a:r>
+              <a:rPr lang="zh-CN" altLang="en-US" dirty="0" smtClean="0">
+                <a:latin typeface="微软雅黑" panose="020B0503020204020204" pitchFamily="34" charset="-122"/>
+                <a:ea typeface="微软雅黑" panose="020B0503020204020204" pitchFamily="34" charset="-122"/>
+                <a:cs typeface="微软雅黑" panose="020B0503020204020204" pitchFamily="34" charset="-122"/>
+              </a:rPr>
+              <a:t>变量进行回复。保存并运行工作流后，系统会弹出文档上传窗口。选择路径下的</a:t>
+            </a:r>
+            <a:r>
+              <a:rPr lang="en-US" altLang="zh-CN" dirty="0" smtClean="0">
+                <a:latin typeface="微软雅黑" panose="020B0503020204020204" pitchFamily="34" charset="-122"/>
+                <a:ea typeface="微软雅黑" panose="020B0503020204020204" pitchFamily="34" charset="-122"/>
+                <a:cs typeface="微软雅黑" panose="020B0503020204020204" pitchFamily="34" charset="-122"/>
+              </a:rPr>
+              <a:t>“ev_market_sample.csv”</a:t>
+            </a:r>
+            <a:r>
+              <a:rPr lang="zh-CN" altLang="en-US" dirty="0" smtClean="0">
+                <a:latin typeface="微软雅黑" panose="020B0503020204020204" pitchFamily="34" charset="-122"/>
+                <a:ea typeface="微软雅黑" panose="020B0503020204020204" pitchFamily="34" charset="-122"/>
+                <a:cs typeface="微软雅黑" panose="020B0503020204020204" pitchFamily="34" charset="-122"/>
+              </a:rPr>
+              <a:t>文件，上传成功后，文件内容会以文本形式在窗口中显示。选择下一步，即可看到文件内容被完整地打印出来。值得注意的是，如果选择</a:t>
+            </a:r>
+            <a:r>
+              <a:rPr lang="en-US" altLang="zh-CN" dirty="0" smtClean="0">
+                <a:latin typeface="微软雅黑" panose="020B0503020204020204" pitchFamily="34" charset="-122"/>
+                <a:ea typeface="微软雅黑" panose="020B0503020204020204" pitchFamily="34" charset="-122"/>
+                <a:cs typeface="微软雅黑" panose="020B0503020204020204" pitchFamily="34" charset="-122"/>
+              </a:rPr>
+              <a:t>“</a:t>
+            </a:r>
+            <a:r>
+              <a:rPr lang="zh-CN" altLang="en-US" dirty="0" smtClean="0">
+                <a:latin typeface="微软雅黑" panose="020B0503020204020204" pitchFamily="34" charset="-122"/>
+                <a:ea typeface="微软雅黑" panose="020B0503020204020204" pitchFamily="34" charset="-122"/>
+                <a:cs typeface="微软雅黑" panose="020B0503020204020204" pitchFamily="34" charset="-122"/>
+              </a:rPr>
+              <a:t>对话流模式</a:t>
+            </a:r>
+            <a:r>
+              <a:rPr lang="en-US" altLang="zh-CN" dirty="0" smtClean="0">
+                <a:latin typeface="微软雅黑" panose="020B0503020204020204" pitchFamily="34" charset="-122"/>
+                <a:ea typeface="微软雅黑" panose="020B0503020204020204" pitchFamily="34" charset="-122"/>
+                <a:cs typeface="微软雅黑" panose="020B0503020204020204" pitchFamily="34" charset="-122"/>
+              </a:rPr>
+              <a:t>”</a:t>
+            </a:r>
+            <a:r>
+              <a:rPr lang="zh-CN" altLang="en-US" dirty="0" smtClean="0">
+                <a:latin typeface="微软雅黑" panose="020B0503020204020204" pitchFamily="34" charset="-122"/>
+                <a:ea typeface="微软雅黑" panose="020B0503020204020204" pitchFamily="34" charset="-122"/>
+                <a:cs typeface="微软雅黑" panose="020B0503020204020204" pitchFamily="34" charset="-122"/>
+              </a:rPr>
+              <a:t>，效果类似，用户发送任意提问后，文件内容也会以同样的文本形式返回，这为后续的数据处理奠定了基础。</a:t>
+            </a:r>
+            <a:endParaRPr lang="zh-CN" altLang="en-US" dirty="0" smtClean="0">
+              <a:latin typeface="微软雅黑" panose="020B0503020204020204" pitchFamily="34" charset="-122"/>
+              <a:ea typeface="微软雅黑" panose="020B0503020204020204" pitchFamily="34" charset="-122"/>
+              <a:cs typeface="微软雅黑" panose="020B0503020204020204" pitchFamily="34" charset="-122"/>
+            </a:endParaRPr>
+          </a:p>
+        </p:txBody>
+      </p:sp>
+      <p:sp>
+        <p:nvSpPr>
+          <p:cNvPr id="6" name="矩形 5"/>
+          <p:cNvSpPr/>
+          <p:nvPr/>
+        </p:nvSpPr>
+        <p:spPr>
+          <a:xfrm>
+            <a:off x="5797550" y="1776888"/>
+            <a:ext cx="5911850" cy="4630261"/>
+          </a:xfrm>
+          <a:prstGeom prst="rect">
+            <a:avLst/>
+          </a:prstGeom>
+          <a:noFill/>
+        </p:spPr>
+        <p:style>
+          <a:lnRef idx="2">
+            <a:schemeClr val="accent1">
+              <a:shade val="50000"/>
+            </a:schemeClr>
+          </a:lnRef>
+          <a:fillRef idx="1">
+            <a:schemeClr val="accent1"/>
+          </a:fillRef>
+          <a:effectRef idx="0">
+            <a:schemeClr val="accent1"/>
+          </a:effectRef>
+          <a:fontRef idx="minor">
+            <a:schemeClr val="lt1"/>
+          </a:fontRef>
+        </p:style>
+        <p:txBody>
+          <a:bodyPr rtlCol="0" anchor="ctr"/>
+          <a:lstStyle/>
+          <a:p>
+            <a:pPr algn="ctr"/>
+            <a:r>
+              <a:rPr lang="zh-CN" altLang="en-US" dirty="0" smtClean="0">
+                <a:solidFill>
+                  <a:schemeClr val="tx1"/>
+                </a:solidFill>
+              </a:rPr>
+              <a:t>教材对步骤图片</a:t>
+            </a:r>
+            <a:endParaRPr lang="zh-CN" altLang="en-US" dirty="0">
+              <a:solidFill>
+                <a:schemeClr val="tx1"/>
+              </a:solidFill>
+            </a:endParaRPr>
+          </a:p>
+        </p:txBody>
+      </p:sp>
+      <p:sp>
+        <p:nvSpPr>
+          <p:cNvPr id="4" name="文本框 3"/>
+          <p:cNvSpPr txBox="1"/>
+          <p:nvPr/>
+        </p:nvSpPr>
+        <p:spPr>
+          <a:xfrm>
+            <a:off x="0" y="793750"/>
+            <a:ext cx="1351262" cy="583565"/>
+          </a:xfrm>
+          <a:prstGeom prst="rect">
+            <a:avLst/>
+          </a:prstGeom>
+          <a:noFill/>
+        </p:spPr>
+        <p:txBody>
+          <a:bodyPr wrap="square" rtlCol="0">
+            <a:spAutoFit/>
+            <a:scene3d>
+              <a:camera prst="orthographicFront"/>
+              <a:lightRig rig="threePt" dir="t"/>
+            </a:scene3d>
+            <a:sp3d contourW="12700"/>
+          </a:bodyPr>
+          <a:lstStyle/>
+          <a:p>
+            <a:pPr algn="ctr"/>
+            <a:r>
+              <a:rPr lang="en-US" sz="3200" dirty="0" smtClean="0">
+                <a:solidFill>
+                  <a:srgbClr val="3F396C"/>
+                </a:solidFill>
+                <a:latin typeface="思源宋体" panose="02020700000000000000" charset="-122"/>
+                <a:ea typeface="思源宋体" panose="02020700000000000000" charset="-122"/>
+              </a:rPr>
+              <a:t>04</a:t>
+            </a:r>
+            <a:endParaRPr lang="en-US" sz="3200" dirty="0" smtClean="0">
+              <a:solidFill>
+                <a:srgbClr val="3F396C"/>
+              </a:solidFill>
+              <a:latin typeface="思源宋体" panose="02020700000000000000" charset="-122"/>
+              <a:ea typeface="思源宋体" panose="02020700000000000000" charset="-122"/>
+            </a:endParaRPr>
+          </a:p>
+        </p:txBody>
+      </p:sp>
+      <p:sp>
+        <p:nvSpPr>
+          <p:cNvPr id="17" name="文本框 16"/>
+          <p:cNvSpPr txBox="1"/>
+          <p:nvPr/>
+        </p:nvSpPr>
+        <p:spPr>
+          <a:xfrm>
+            <a:off x="1278000" y="792000"/>
+            <a:ext cx="3932555" cy="583565"/>
+          </a:xfrm>
+          <a:prstGeom prst="rect">
+            <a:avLst/>
+          </a:prstGeom>
+          <a:noFill/>
+        </p:spPr>
+        <p:txBody>
+          <a:bodyPr wrap="square" rtlCol="0">
+            <a:spAutoFit/>
+            <a:scene3d>
+              <a:camera prst="orthographicFront"/>
+              <a:lightRig rig="threePt" dir="t"/>
+            </a:scene3d>
+            <a:sp3d contourW="12700"/>
+          </a:bodyPr>
+          <a:lstStyle>
+            <a:defPPr>
+              <a:defRPr lang="en-US"/>
+            </a:defPPr>
+            <a:lvl1pPr algn="ctr">
+              <a:defRPr sz="3200">
+                <a:gradFill>
+                  <a:gsLst>
+                    <a:gs pos="0">
+                      <a:schemeClr val="tx1">
+                        <a:lumMod val="50000"/>
+                        <a:lumOff val="50000"/>
+                      </a:schemeClr>
+                    </a:gs>
+                    <a:gs pos="100000">
+                      <a:schemeClr val="tx1">
+                        <a:lumMod val="85000"/>
+                        <a:lumOff val="15000"/>
+                      </a:schemeClr>
+                    </a:gs>
+                  </a:gsLst>
+                  <a:lin ang="5400000" scaled="1"/>
+                </a:gradFill>
+              </a:defRPr>
+            </a:lvl1pPr>
+          </a:lstStyle>
+          <a:p>
+            <a:pPr marL="0" marR="0" lvl="0" indent="0" algn="l" defTabSz="914400" rtl="0" eaLnBrk="1" fontAlgn="auto" latinLnBrk="0" hangingPunct="1">
+              <a:lnSpc>
+                <a:spcPct val="100000"/>
+              </a:lnSpc>
+              <a:spcBef>
+                <a:spcPts val="0"/>
+              </a:spcBef>
+              <a:spcAft>
+                <a:spcPts val="0"/>
+              </a:spcAft>
+              <a:buClrTx/>
+              <a:buSzTx/>
+              <a:buFontTx/>
+              <a:buNone/>
+              <a:defRPr/>
+            </a:pPr>
+            <a:r>
+              <a:rPr lang="zh-CN" altLang="en-US" b="1" dirty="0">
+                <a:solidFill>
+                  <a:schemeClr val="accent1">
+                    <a:lumMod val="75000"/>
+                  </a:schemeClr>
+                </a:solidFill>
+                <a:latin typeface="微软雅黑" panose="020B0503020204020204" pitchFamily="34" charset="-122"/>
+                <a:ea typeface="微软雅黑" panose="020B0503020204020204" pitchFamily="34" charset="-122"/>
+                <a:cs typeface="微软雅黑" panose="020B0503020204020204" pitchFamily="34" charset="-122"/>
+                <a:sym typeface="+mn-lt"/>
+              </a:rPr>
+              <a:t>任务</a:t>
+            </a:r>
+            <a:r>
+              <a:rPr lang="zh-CN" altLang="en-US" b="1" dirty="0">
+                <a:solidFill>
+                  <a:schemeClr val="accent1">
+                    <a:lumMod val="75000"/>
+                  </a:schemeClr>
+                </a:solidFill>
+                <a:latin typeface="微软雅黑" panose="020B0503020204020204" pitchFamily="34" charset="-122"/>
+                <a:ea typeface="微软雅黑" panose="020B0503020204020204" pitchFamily="34" charset="-122"/>
+                <a:cs typeface="微软雅黑" panose="020B0503020204020204" pitchFamily="34" charset="-122"/>
+                <a:sym typeface="+mn-lt"/>
+              </a:rPr>
+              <a:t>实施</a:t>
+            </a:r>
+            <a:endParaRPr lang="zh-CN" altLang="en-US" b="1" dirty="0">
+              <a:solidFill>
+                <a:schemeClr val="accent1">
+                  <a:lumMod val="75000"/>
+                </a:schemeClr>
+              </a:solidFill>
+              <a:latin typeface="微软雅黑" panose="020B0503020204020204" pitchFamily="34" charset="-122"/>
+              <a:ea typeface="微软雅黑" panose="020B0503020204020204" pitchFamily="34" charset="-122"/>
+              <a:cs typeface="微软雅黑" panose="020B0503020204020204" pitchFamily="34" charset="-122"/>
+              <a:sym typeface="+mn-lt"/>
+            </a:endParaRPr>
+          </a:p>
+        </p:txBody>
+      </p:sp>
+    </p:spTree>
+  </p:cSld>
+  <p:clrMapOvr>
+    <a:masterClrMapping/>
+  </p:clrMapOvr>
+</p:sld>
+</file>
+
+<file path=ppt/slides/slide6.xml><?xml version="1.0" encoding="utf-8"?>
+<p:sld xmlns:a="http://schemas.openxmlformats.org/drawingml/2006/main" xmlns:r="http://schemas.openxmlformats.org/officeDocument/2006/relationships" xmlns:p="http://schemas.openxmlformats.org/presentationml/2006/main">
+  <p:cSld>
+    <p:spTree>
+      <p:nvGrpSpPr>
+        <p:cNvPr id="1" name=""/>
+        <p:cNvGrpSpPr/>
+        <p:nvPr/>
+      </p:nvGrpSpPr>
+      <p:grpSpPr>
+        <a:xfrm>
+          <a:off x="0" y="0"/>
+          <a:ext cx="0" cy="0"/>
+          <a:chOff x="0" y="0"/>
+          <a:chExt cx="0" cy="0"/>
+        </a:xfrm>
+      </p:grpSpPr>
+      <p:sp>
+        <p:nvSpPr>
+          <p:cNvPr id="3" name="文本框 2"/>
+          <p:cNvSpPr txBox="1"/>
+          <p:nvPr/>
+        </p:nvSpPr>
+        <p:spPr>
+          <a:xfrm>
+            <a:off x="1175385" y="1377315"/>
+            <a:ext cx="9841230" cy="2282190"/>
+          </a:xfrm>
+          <a:prstGeom prst="rect">
+            <a:avLst/>
+          </a:prstGeom>
+          <a:noFill/>
+        </p:spPr>
+        <p:txBody>
+          <a:bodyPr wrap="square" rtlCol="0" anchor="t">
+            <a:noAutofit/>
+          </a:bodyPr>
+          <a:lstStyle/>
+          <a:p>
+            <a:pPr indent="457200" fontAlgn="auto">
+              <a:lnSpc>
+                <a:spcPct val="150000"/>
+              </a:lnSpc>
+            </a:pPr>
+            <a:r>
+              <a:rPr lang="zh-CN" dirty="0" smtClean="0">
+                <a:latin typeface="微软雅黑" panose="020B0503020204020204" pitchFamily="34" charset="-122"/>
+                <a:ea typeface="微软雅黑" panose="020B0503020204020204" pitchFamily="34" charset="-122"/>
+                <a:cs typeface="微软雅黑" panose="020B0503020204020204" pitchFamily="34" charset="-122"/>
+              </a:rPr>
+              <a:t>上传文件后，返回的内容不仅包含以字典格式呈现的文本数据，还包含了文件的相关元信息。因此，直接使用这些原始数据并不方便，需要先对这段文本进行清洗和格式化，才能被后续的节点有效利用。虽然可以让智能体直接处理文件，但这会消耗大量的</a:t>
+            </a:r>
+            <a:r>
+              <a:rPr lang="en-US" altLang="zh-CN" dirty="0" smtClean="0">
+                <a:latin typeface="微软雅黑" panose="020B0503020204020204" pitchFamily="34" charset="-122"/>
+                <a:ea typeface="微软雅黑" panose="020B0503020204020204" pitchFamily="34" charset="-122"/>
+                <a:cs typeface="微软雅黑" panose="020B0503020204020204" pitchFamily="34" charset="-122"/>
+              </a:rPr>
+              <a:t>Token</a:t>
+            </a:r>
+            <a:r>
+              <a:rPr lang="zh-CN" altLang="en-US" dirty="0" smtClean="0">
+                <a:latin typeface="微软雅黑" panose="020B0503020204020204" pitchFamily="34" charset="-122"/>
+                <a:ea typeface="微软雅黑" panose="020B0503020204020204" pitchFamily="34" charset="-122"/>
+                <a:cs typeface="微软雅黑" panose="020B0503020204020204" pitchFamily="34" charset="-122"/>
+              </a:rPr>
+              <a:t>和上下文资源，效率较低。更优的解决方案是调用代码工具来实现这一处理过程。</a:t>
+            </a:r>
+            <a:endParaRPr lang="zh-CN" altLang="en-US" dirty="0" smtClean="0">
+              <a:latin typeface="微软雅黑" panose="020B0503020204020204" pitchFamily="34" charset="-122"/>
+              <a:ea typeface="微软雅黑" panose="020B0503020204020204" pitchFamily="34" charset="-122"/>
+              <a:cs typeface="微软雅黑" panose="020B0503020204020204" pitchFamily="34" charset="-122"/>
+            </a:endParaRPr>
+          </a:p>
+        </p:txBody>
+      </p:sp>
+      <p:sp>
+        <p:nvSpPr>
+          <p:cNvPr id="6" name="矩形 5"/>
+          <p:cNvSpPr/>
+          <p:nvPr/>
+        </p:nvSpPr>
+        <p:spPr>
+          <a:xfrm>
+            <a:off x="1954896" y="3657124"/>
+            <a:ext cx="8211454" cy="2991484"/>
+          </a:xfrm>
+          <a:prstGeom prst="rect">
+            <a:avLst/>
+          </a:prstGeom>
+          <a:noFill/>
+        </p:spPr>
+        <p:style>
+          <a:lnRef idx="2">
+            <a:schemeClr val="accent1">
+              <a:shade val="50000"/>
+            </a:schemeClr>
+          </a:lnRef>
+          <a:fillRef idx="1">
+            <a:schemeClr val="accent1"/>
+          </a:fillRef>
+          <a:effectRef idx="0">
+            <a:schemeClr val="accent1"/>
+          </a:effectRef>
+          <a:fontRef idx="minor">
+            <a:schemeClr val="lt1"/>
+          </a:fontRef>
+        </p:style>
+        <p:txBody>
+          <a:bodyPr rtlCol="0" anchor="ctr"/>
+          <a:lstStyle/>
+          <a:p>
+            <a:pPr algn="ctr"/>
+            <a:r>
+              <a:rPr lang="zh-CN" altLang="en-US" dirty="0">
+                <a:solidFill>
+                  <a:schemeClr val="tx1"/>
+                </a:solidFill>
+              </a:rPr>
+              <a:t>教材对步骤图片</a:t>
+            </a:r>
+            <a:endParaRPr lang="zh-CN" altLang="en-US" dirty="0">
+              <a:solidFill>
+                <a:schemeClr val="tx1"/>
+              </a:solidFill>
+            </a:endParaRPr>
+          </a:p>
+        </p:txBody>
+      </p:sp>
+      <p:sp>
+        <p:nvSpPr>
+          <p:cNvPr id="2" name="文本框 1"/>
+          <p:cNvSpPr txBox="1"/>
+          <p:nvPr/>
+        </p:nvSpPr>
+        <p:spPr>
+          <a:xfrm>
+            <a:off x="0" y="793750"/>
+            <a:ext cx="1351262" cy="583565"/>
+          </a:xfrm>
+          <a:prstGeom prst="rect">
+            <a:avLst/>
+          </a:prstGeom>
+          <a:noFill/>
+        </p:spPr>
+        <p:txBody>
+          <a:bodyPr wrap="square" rtlCol="0">
+            <a:spAutoFit/>
+            <a:scene3d>
+              <a:camera prst="orthographicFront"/>
+              <a:lightRig rig="threePt" dir="t"/>
+            </a:scene3d>
+            <a:sp3d contourW="12700"/>
+          </a:bodyPr>
+          <a:lstStyle/>
+          <a:p>
+            <a:pPr algn="ctr"/>
+            <a:r>
+              <a:rPr lang="en-US" sz="3200" dirty="0" smtClean="0">
+                <a:solidFill>
+                  <a:srgbClr val="3F396C"/>
+                </a:solidFill>
+                <a:latin typeface="思源宋体" panose="02020700000000000000" charset="-122"/>
+                <a:ea typeface="思源宋体" panose="02020700000000000000" charset="-122"/>
+              </a:rPr>
+              <a:t>04</a:t>
+            </a:r>
+            <a:endParaRPr lang="en-US" sz="3200" dirty="0" smtClean="0">
+              <a:solidFill>
+                <a:srgbClr val="3F396C"/>
+              </a:solidFill>
+              <a:latin typeface="思源宋体" panose="02020700000000000000" charset="-122"/>
+              <a:ea typeface="思源宋体" panose="02020700000000000000" charset="-122"/>
+            </a:endParaRPr>
+          </a:p>
+        </p:txBody>
+      </p:sp>
+      <p:sp>
+        <p:nvSpPr>
+          <p:cNvPr id="17" name="文本框 16"/>
+          <p:cNvSpPr txBox="1"/>
+          <p:nvPr/>
+        </p:nvSpPr>
+        <p:spPr>
+          <a:xfrm>
+            <a:off x="1278000" y="792000"/>
+            <a:ext cx="3932555" cy="583565"/>
+          </a:xfrm>
+          <a:prstGeom prst="rect">
+            <a:avLst/>
+          </a:prstGeom>
+          <a:noFill/>
+        </p:spPr>
+        <p:txBody>
+          <a:bodyPr wrap="square" rtlCol="0">
+            <a:spAutoFit/>
+            <a:scene3d>
+              <a:camera prst="orthographicFront"/>
+              <a:lightRig rig="threePt" dir="t"/>
+            </a:scene3d>
+            <a:sp3d contourW="12700"/>
+          </a:bodyPr>
+          <a:lstStyle>
+            <a:defPPr>
+              <a:defRPr lang="en-US"/>
+            </a:defPPr>
+            <a:lvl1pPr algn="ctr">
+              <a:defRPr sz="3200">
+                <a:gradFill>
+                  <a:gsLst>
+                    <a:gs pos="0">
+                      <a:schemeClr val="tx1">
+                        <a:lumMod val="50000"/>
+                        <a:lumOff val="50000"/>
+                      </a:schemeClr>
+                    </a:gs>
+                    <a:gs pos="100000">
+                      <a:schemeClr val="tx1">
+                        <a:lumMod val="85000"/>
+                        <a:lumOff val="15000"/>
+                      </a:schemeClr>
+                    </a:gs>
+                  </a:gsLst>
+                  <a:lin ang="5400000" scaled="1"/>
+                </a:gradFill>
+              </a:defRPr>
+            </a:lvl1pPr>
+          </a:lstStyle>
+          <a:p>
+            <a:pPr marL="0" marR="0" lvl="0" indent="0" algn="l" defTabSz="914400" rtl="0" eaLnBrk="1" fontAlgn="auto" latinLnBrk="0" hangingPunct="1">
+              <a:lnSpc>
+                <a:spcPct val="100000"/>
+              </a:lnSpc>
+              <a:spcBef>
+                <a:spcPts val="0"/>
+              </a:spcBef>
+              <a:spcAft>
+                <a:spcPts val="0"/>
+              </a:spcAft>
+              <a:buClrTx/>
+              <a:buSzTx/>
+              <a:buFontTx/>
+              <a:buNone/>
+              <a:defRPr/>
+            </a:pPr>
+            <a:r>
+              <a:rPr lang="zh-CN" altLang="en-US" b="1" dirty="0">
+                <a:solidFill>
+                  <a:schemeClr val="accent1">
+                    <a:lumMod val="75000"/>
+                  </a:schemeClr>
+                </a:solidFill>
+                <a:latin typeface="微软雅黑" panose="020B0503020204020204" pitchFamily="34" charset="-122"/>
+                <a:ea typeface="微软雅黑" panose="020B0503020204020204" pitchFamily="34" charset="-122"/>
+                <a:cs typeface="微软雅黑" panose="020B0503020204020204" pitchFamily="34" charset="-122"/>
+                <a:sym typeface="+mn-lt"/>
+              </a:rPr>
+              <a:t>任务</a:t>
+            </a:r>
+            <a:r>
+              <a:rPr lang="zh-CN" altLang="en-US" b="1" dirty="0">
+                <a:solidFill>
+                  <a:schemeClr val="accent1">
+                    <a:lumMod val="75000"/>
+                  </a:schemeClr>
+                </a:solidFill>
+                <a:latin typeface="微软雅黑" panose="020B0503020204020204" pitchFamily="34" charset="-122"/>
+                <a:ea typeface="微软雅黑" panose="020B0503020204020204" pitchFamily="34" charset="-122"/>
+                <a:cs typeface="微软雅黑" panose="020B0503020204020204" pitchFamily="34" charset="-122"/>
+                <a:sym typeface="+mn-lt"/>
+              </a:rPr>
+              <a:t>实施</a:t>
+            </a:r>
+            <a:endParaRPr lang="zh-CN" altLang="en-US" b="1" dirty="0">
+              <a:solidFill>
+                <a:schemeClr val="accent1">
+                  <a:lumMod val="75000"/>
+                </a:schemeClr>
+              </a:solidFill>
+              <a:latin typeface="微软雅黑" panose="020B0503020204020204" pitchFamily="34" charset="-122"/>
+              <a:ea typeface="微软雅黑" panose="020B0503020204020204" pitchFamily="34" charset="-122"/>
+              <a:cs typeface="微软雅黑" panose="020B0503020204020204" pitchFamily="34" charset="-122"/>
+              <a:sym typeface="+mn-lt"/>
+            </a:endParaRPr>
+          </a:p>
+        </p:txBody>
+      </p:sp>
+    </p:spTree>
+  </p:cSld>
+  <p:clrMapOvr>
+    <a:masterClrMapping/>
+  </p:clrMapOvr>
+</p:sld>
+</file>
+
 <file path=ppt/slides/slide7.xml><?xml version="1.0" encoding="utf-8"?>
 <p:sld xmlns:a="http://schemas.openxmlformats.org/drawingml/2006/main" xmlns:r="http://schemas.openxmlformats.org/officeDocument/2006/relationships" xmlns:p="http://schemas.openxmlformats.org/presentationml/2006/main">
   <p:cSld>
@@ -10289,8 +10068,8 @@
         </p:nvSpPr>
         <p:spPr>
           <a:xfrm>
-            <a:off x="1175385" y="1377315"/>
-            <a:ext cx="9841230" cy="2282190"/>
+            <a:off x="155575" y="1777365"/>
+            <a:ext cx="5502275" cy="4629150"/>
           </a:xfrm>
           <a:prstGeom prst="rect">
             <a:avLst/>
@@ -10314,7 +10093,7 @@
                 <a:ea typeface="微软雅黑" panose="020B0503020204020204" pitchFamily="34" charset="-122"/>
                 <a:cs typeface="微软雅黑" panose="020B0503020204020204" pitchFamily="34" charset="-122"/>
               </a:rPr>
-              <a:t>通过这两个案例，希望学员理解以下几点信息：第一，简单的</a:t>
+              <a:t>具体操作是创建一个代码节点，将上传的</a:t>
             </a:r>
             <a:r>
               <a:rPr lang="en-US" altLang="zh-CN" dirty="0" smtClean="0">
@@ -10322,7 +10101,7 @@
                 <a:ea typeface="微软雅黑" panose="020B0503020204020204" pitchFamily="34" charset="-122"/>
                 <a:cs typeface="微软雅黑" panose="020B0503020204020204" pitchFamily="34" charset="-122"/>
               </a:rPr>
-              <a:t>Prompt</a:t>
+              <a:t>csv</a:t>
             </a:r>
             <a:r>
               <a:rPr lang="zh-CN" altLang="en-US" dirty="0" smtClean="0">
@@ -10330,7 +10109,7 @@
                 <a:ea typeface="微软雅黑" panose="020B0503020204020204" pitchFamily="34" charset="-122"/>
                 <a:cs typeface="微软雅黑" panose="020B0503020204020204" pitchFamily="34" charset="-122"/>
               </a:rPr>
-              <a:t>常常只能生成摘要，却不能直接形成协作结果，无法满足实际业务需求；第二，一旦在</a:t>
+              <a:t>文件作为传入参数。在代码中，将读取到的文本内容从</a:t>
             </a:r>
             <a:r>
               <a:rPr lang="en-US" altLang="zh-CN" dirty="0" smtClean="0">
@@ -10338,7 +10117,7 @@
                 <a:ea typeface="微软雅黑" panose="020B0503020204020204" pitchFamily="34" charset="-122"/>
                 <a:cs typeface="微软雅黑" panose="020B0503020204020204" pitchFamily="34" charset="-122"/>
               </a:rPr>
-              <a:t>Prompt</a:t>
+              <a:t>CSV</a:t>
             </a:r>
             <a:r>
               <a:rPr lang="zh-CN" altLang="en-US" dirty="0" smtClean="0">
@@ -10346,7 +10125,71 @@
                 <a:ea typeface="微软雅黑" panose="020B0503020204020204" pitchFamily="34" charset="-122"/>
                 <a:cs typeface="微软雅黑" panose="020B0503020204020204" pitchFamily="34" charset="-122"/>
               </a:rPr>
-              <a:t>中明确要求责任人和截止时间等细节信息，提示词的业务导向就会明显增强，输出结果也会更加实用；第三，提示词工程不是语言修饰，而是业务信息提取设计，其本质是帮助智能体理解用户真实需求，并按照业务逻辑输出结构化信息。</a:t>
+              <a:t>格式转换为</a:t>
+            </a:r>
+            <a:r>
+              <a:rPr lang="en-US" altLang="zh-CN" dirty="0" smtClean="0">
+                <a:latin typeface="微软雅黑" panose="020B0503020204020204" pitchFamily="34" charset="-122"/>
+                <a:ea typeface="微软雅黑" panose="020B0503020204020204" pitchFamily="34" charset="-122"/>
+                <a:cs typeface="微软雅黑" panose="020B0503020204020204" pitchFamily="34" charset="-122"/>
+              </a:rPr>
+              <a:t>JSON</a:t>
+            </a:r>
+            <a:r>
+              <a:rPr lang="zh-CN" altLang="en-US" dirty="0" smtClean="0">
+                <a:latin typeface="微软雅黑" panose="020B0503020204020204" pitchFamily="34" charset="-122"/>
+                <a:ea typeface="微软雅黑" panose="020B0503020204020204" pitchFamily="34" charset="-122"/>
+                <a:cs typeface="微软雅黑" panose="020B0503020204020204" pitchFamily="34" charset="-122"/>
+              </a:rPr>
+              <a:t>列表的格式，这样每条数据都成为一个结构化的对象。最后，将输出格式设置为</a:t>
+            </a:r>
+            <a:r>
+              <a:rPr lang="en-US" altLang="zh-CN" dirty="0" smtClean="0">
+                <a:latin typeface="微软雅黑" panose="020B0503020204020204" pitchFamily="34" charset="-122"/>
+                <a:ea typeface="微软雅黑" panose="020B0503020204020204" pitchFamily="34" charset="-122"/>
+                <a:cs typeface="微软雅黑" panose="020B0503020204020204" pitchFamily="34" charset="-122"/>
+              </a:rPr>
+              <a:t>“object”</a:t>
+            </a:r>
+            <a:r>
+              <a:rPr lang="zh-CN" altLang="en-US" dirty="0" smtClean="0">
+                <a:latin typeface="微软雅黑" panose="020B0503020204020204" pitchFamily="34" charset="-122"/>
+                <a:ea typeface="微软雅黑" panose="020B0503020204020204" pitchFamily="34" charset="-122"/>
+                <a:cs typeface="微软雅黑" panose="020B0503020204020204" pitchFamily="34" charset="-122"/>
+              </a:rPr>
+              <a:t>，确保数据以标准的</a:t>
+            </a:r>
+            <a:r>
+              <a:rPr lang="en-US" altLang="zh-CN" dirty="0" smtClean="0">
+                <a:latin typeface="微软雅黑" panose="020B0503020204020204" pitchFamily="34" charset="-122"/>
+                <a:ea typeface="微软雅黑" panose="020B0503020204020204" pitchFamily="34" charset="-122"/>
+                <a:cs typeface="微软雅黑" panose="020B0503020204020204" pitchFamily="34" charset="-122"/>
+              </a:rPr>
+              <a:t>JSON</a:t>
+            </a:r>
+            <a:r>
+              <a:rPr lang="zh-CN" altLang="en-US" dirty="0" smtClean="0">
+                <a:latin typeface="微软雅黑" panose="020B0503020204020204" pitchFamily="34" charset="-122"/>
+                <a:ea typeface="微软雅黑" panose="020B0503020204020204" pitchFamily="34" charset="-122"/>
+                <a:cs typeface="微软雅黑" panose="020B0503020204020204" pitchFamily="34" charset="-122"/>
+              </a:rPr>
+              <a:t>对象形式传递。再次运行工作流并上传文件后，可以看到数据结果已经成功转换为预期的</a:t>
+            </a:r>
+            <a:r>
+              <a:rPr lang="en-US" altLang="zh-CN" dirty="0" smtClean="0">
+                <a:latin typeface="微软雅黑" panose="020B0503020204020204" pitchFamily="34" charset="-122"/>
+                <a:ea typeface="微软雅黑" panose="020B0503020204020204" pitchFamily="34" charset="-122"/>
+                <a:cs typeface="微软雅黑" panose="020B0503020204020204" pitchFamily="34" charset="-122"/>
+              </a:rPr>
+              <a:t>JSON</a:t>
+            </a:r>
+            <a:r>
+              <a:rPr lang="zh-CN" altLang="en-US" dirty="0" smtClean="0">
+                <a:latin typeface="微软雅黑" panose="020B0503020204020204" pitchFamily="34" charset="-122"/>
+                <a:ea typeface="微软雅黑" panose="020B0503020204020204" pitchFamily="34" charset="-122"/>
+                <a:cs typeface="微软雅黑" panose="020B0503020204020204" pitchFamily="34" charset="-122"/>
+              </a:rPr>
+              <a:t>格式列表，结构清晰，便于后续程序化处理和分析。</a:t>
             </a:r>
             <a:endParaRPr lang="zh-CN" altLang="en-US" dirty="0" smtClean="0">
               <a:latin typeface="微软雅黑" panose="020B0503020204020204" pitchFamily="34" charset="-122"/>
@@ -10364,8 +10207,8 @@
         </p:nvSpPr>
         <p:spPr>
           <a:xfrm>
-            <a:off x="1954896" y="3657124"/>
-            <a:ext cx="8211454" cy="2991484"/>
+            <a:off x="5797550" y="1776888"/>
+            <a:ext cx="5911850" cy="4630261"/>
           </a:xfrm>
           <a:prstGeom prst="rect">
             <a:avLst/>
@@ -10394,7 +10237,7 @@
           <a:p>
             <a:pPr algn="ctr"/>
             <a:r>
-              <a:rPr lang="zh-CN" altLang="en-US" dirty="0">
+              <a:rPr lang="zh-CN" altLang="en-US" dirty="0" smtClean="0">
                 <a:solidFill>
                   <a:schemeClr val="tx1"/>
                 </a:solidFill>
@@ -10411,7 +10254,901 @@
       </p:sp>
       <p:sp>
         <p:nvSpPr>
+          <p:cNvPr id="4" name="文本框 3"/>
+          <p:cNvSpPr txBox="1"/>
+          <p:nvPr/>
+        </p:nvSpPr>
+        <p:spPr>
+          <a:xfrm>
+            <a:off x="0" y="793750"/>
+            <a:ext cx="1351262" cy="583565"/>
+          </a:xfrm>
+          <a:prstGeom prst="rect">
+            <a:avLst/>
+          </a:prstGeom>
+          <a:noFill/>
+        </p:spPr>
+        <p:txBody>
+          <a:bodyPr wrap="square" rtlCol="0">
+            <a:spAutoFit/>
+            <a:scene3d>
+              <a:camera prst="orthographicFront"/>
+              <a:lightRig rig="threePt" dir="t"/>
+            </a:scene3d>
+            <a:sp3d contourW="12700"/>
+          </a:bodyPr>
+          <a:lstStyle/>
+          <a:p>
+            <a:pPr algn="ctr"/>
+            <a:r>
+              <a:rPr lang="en-US" sz="3200" dirty="0" smtClean="0">
+                <a:solidFill>
+                  <a:srgbClr val="3F396C"/>
+                </a:solidFill>
+                <a:latin typeface="思源宋体" panose="02020700000000000000" charset="-122"/>
+                <a:ea typeface="思源宋体" panose="02020700000000000000" charset="-122"/>
+              </a:rPr>
+              <a:t>04</a:t>
+            </a:r>
+            <a:endParaRPr lang="en-US" sz="3200" dirty="0" smtClean="0">
+              <a:solidFill>
+                <a:srgbClr val="3F396C"/>
+              </a:solidFill>
+              <a:latin typeface="思源宋体" panose="02020700000000000000" charset="-122"/>
+              <a:ea typeface="思源宋体" panose="02020700000000000000" charset="-122"/>
+            </a:endParaRPr>
+          </a:p>
+        </p:txBody>
+      </p:sp>
+      <p:sp>
+        <p:nvSpPr>
+          <p:cNvPr id="17" name="文本框 16"/>
+          <p:cNvSpPr txBox="1"/>
+          <p:nvPr/>
+        </p:nvSpPr>
+        <p:spPr>
+          <a:xfrm>
+            <a:off x="1278000" y="792000"/>
+            <a:ext cx="3932555" cy="583565"/>
+          </a:xfrm>
+          <a:prstGeom prst="rect">
+            <a:avLst/>
+          </a:prstGeom>
+          <a:noFill/>
+        </p:spPr>
+        <p:txBody>
+          <a:bodyPr wrap="square" rtlCol="0">
+            <a:spAutoFit/>
+            <a:scene3d>
+              <a:camera prst="orthographicFront"/>
+              <a:lightRig rig="threePt" dir="t"/>
+            </a:scene3d>
+            <a:sp3d contourW="12700"/>
+          </a:bodyPr>
+          <a:lstStyle>
+            <a:defPPr>
+              <a:defRPr lang="en-US"/>
+            </a:defPPr>
+            <a:lvl1pPr algn="ctr">
+              <a:defRPr sz="3200">
+                <a:gradFill>
+                  <a:gsLst>
+                    <a:gs pos="0">
+                      <a:schemeClr val="tx1">
+                        <a:lumMod val="50000"/>
+                        <a:lumOff val="50000"/>
+                      </a:schemeClr>
+                    </a:gs>
+                    <a:gs pos="100000">
+                      <a:schemeClr val="tx1">
+                        <a:lumMod val="85000"/>
+                        <a:lumOff val="15000"/>
+                      </a:schemeClr>
+                    </a:gs>
+                  </a:gsLst>
+                  <a:lin ang="5400000" scaled="1"/>
+                </a:gradFill>
+              </a:defRPr>
+            </a:lvl1pPr>
+          </a:lstStyle>
+          <a:p>
+            <a:pPr marL="0" marR="0" lvl="0" indent="0" algn="l" defTabSz="914400" rtl="0" eaLnBrk="1" fontAlgn="auto" latinLnBrk="0" hangingPunct="1">
+              <a:lnSpc>
+                <a:spcPct val="100000"/>
+              </a:lnSpc>
+              <a:spcBef>
+                <a:spcPts val="0"/>
+              </a:spcBef>
+              <a:spcAft>
+                <a:spcPts val="0"/>
+              </a:spcAft>
+              <a:buClrTx/>
+              <a:buSzTx/>
+              <a:buFontTx/>
+              <a:buNone/>
+              <a:defRPr/>
+            </a:pPr>
+            <a:r>
+              <a:rPr lang="zh-CN" altLang="en-US" b="1" dirty="0">
+                <a:solidFill>
+                  <a:schemeClr val="accent1">
+                    <a:lumMod val="75000"/>
+                  </a:schemeClr>
+                </a:solidFill>
+                <a:latin typeface="微软雅黑" panose="020B0503020204020204" pitchFamily="34" charset="-122"/>
+                <a:ea typeface="微软雅黑" panose="020B0503020204020204" pitchFamily="34" charset="-122"/>
+                <a:cs typeface="微软雅黑" panose="020B0503020204020204" pitchFamily="34" charset="-122"/>
+                <a:sym typeface="+mn-lt"/>
+              </a:rPr>
+              <a:t>任务</a:t>
+            </a:r>
+            <a:r>
+              <a:rPr lang="zh-CN" altLang="en-US" b="1" dirty="0">
+                <a:solidFill>
+                  <a:schemeClr val="accent1">
+                    <a:lumMod val="75000"/>
+                  </a:schemeClr>
+                </a:solidFill>
+                <a:latin typeface="微软雅黑" panose="020B0503020204020204" pitchFamily="34" charset="-122"/>
+                <a:ea typeface="微软雅黑" panose="020B0503020204020204" pitchFamily="34" charset="-122"/>
+                <a:cs typeface="微软雅黑" panose="020B0503020204020204" pitchFamily="34" charset="-122"/>
+                <a:sym typeface="+mn-lt"/>
+              </a:rPr>
+              <a:t>实施</a:t>
+            </a:r>
+            <a:endParaRPr lang="zh-CN" altLang="en-US" b="1" dirty="0">
+              <a:solidFill>
+                <a:schemeClr val="accent1">
+                  <a:lumMod val="75000"/>
+                </a:schemeClr>
+              </a:solidFill>
+              <a:latin typeface="微软雅黑" panose="020B0503020204020204" pitchFamily="34" charset="-122"/>
+              <a:ea typeface="微软雅黑" panose="020B0503020204020204" pitchFamily="34" charset="-122"/>
+              <a:cs typeface="微软雅黑" panose="020B0503020204020204" pitchFamily="34" charset="-122"/>
+              <a:sym typeface="+mn-lt"/>
+            </a:endParaRPr>
+          </a:p>
+        </p:txBody>
+      </p:sp>
+    </p:spTree>
+  </p:cSld>
+  <p:clrMapOvr>
+    <a:masterClrMapping/>
+  </p:clrMapOvr>
+</p:sld>
+</file>
+
+<file path=ppt/slides/slide8.xml><?xml version="1.0" encoding="utf-8"?>
+<p:sld xmlns:a="http://schemas.openxmlformats.org/drawingml/2006/main" xmlns:r="http://schemas.openxmlformats.org/officeDocument/2006/relationships" xmlns:p="http://schemas.openxmlformats.org/presentationml/2006/main">
+  <p:cSld>
+    <p:spTree>
+      <p:nvGrpSpPr>
+        <p:cNvPr id="1" name=""/>
+        <p:cNvGrpSpPr/>
+        <p:nvPr/>
+      </p:nvGrpSpPr>
+      <p:grpSpPr>
+        <a:xfrm>
+          <a:off x="0" y="0"/>
+          <a:ext cx="0" cy="0"/>
+          <a:chOff x="0" y="0"/>
+          <a:chExt cx="0" cy="0"/>
+        </a:xfrm>
+      </p:grpSpPr>
+      <p:sp>
+        <p:nvSpPr>
+          <p:cNvPr id="3" name="文本框 2"/>
+          <p:cNvSpPr txBox="1"/>
+          <p:nvPr/>
+        </p:nvSpPr>
+        <p:spPr>
+          <a:xfrm>
+            <a:off x="1175385" y="1377315"/>
+            <a:ext cx="9841230" cy="2282190"/>
+          </a:xfrm>
+          <a:prstGeom prst="rect">
+            <a:avLst/>
+          </a:prstGeom>
+          <a:noFill/>
+        </p:spPr>
+        <p:txBody>
+          <a:bodyPr wrap="square" rtlCol="0" anchor="t">
+            <a:noAutofit/>
+          </a:bodyPr>
+          <a:lstStyle/>
+          <a:p>
+            <a:pPr indent="457200" fontAlgn="auto">
+              <a:lnSpc>
+                <a:spcPct val="150000"/>
+              </a:lnSpc>
+            </a:pPr>
+            <a:r>
+              <a:rPr lang="zh-CN" dirty="0" smtClean="0">
+                <a:latin typeface="微软雅黑" panose="020B0503020204020204" pitchFamily="34" charset="-122"/>
+                <a:ea typeface="微软雅黑" panose="020B0503020204020204" pitchFamily="34" charset="-122"/>
+                <a:cs typeface="微软雅黑" panose="020B0503020204020204" pitchFamily="34" charset="-122"/>
+              </a:rPr>
+              <a:t>格式化后的</a:t>
+            </a:r>
+            <a:r>
+              <a:rPr lang="en-US" altLang="zh-CN" dirty="0" smtClean="0">
+                <a:latin typeface="微软雅黑" panose="020B0503020204020204" pitchFamily="34" charset="-122"/>
+                <a:ea typeface="微软雅黑" panose="020B0503020204020204" pitchFamily="34" charset="-122"/>
+                <a:cs typeface="微软雅黑" panose="020B0503020204020204" pitchFamily="34" charset="-122"/>
+              </a:rPr>
+              <a:t>JSON</a:t>
+            </a:r>
+            <a:r>
+              <a:rPr lang="zh-CN" altLang="en-US" dirty="0" smtClean="0">
+                <a:latin typeface="微软雅黑" panose="020B0503020204020204" pitchFamily="34" charset="-122"/>
+                <a:ea typeface="微软雅黑" panose="020B0503020204020204" pitchFamily="34" charset="-122"/>
+                <a:cs typeface="微软雅黑" panose="020B0503020204020204" pitchFamily="34" charset="-122"/>
+              </a:rPr>
+              <a:t>数据虽然结构清晰，但对于人类阅读者来说，直接查看列表仍然不够直观。为了更直观地洞察数据，可以再添加一个代码节点来实现简单的数据分析功能。本步骤的目标是分析</a:t>
+            </a:r>
+            <a:r>
+              <a:rPr lang="en-US" altLang="zh-CN" dirty="0" smtClean="0">
+                <a:latin typeface="微软雅黑" panose="020B0503020204020204" pitchFamily="34" charset="-122"/>
+                <a:ea typeface="微软雅黑" panose="020B0503020204020204" pitchFamily="34" charset="-122"/>
+                <a:cs typeface="微软雅黑" panose="020B0503020204020204" pitchFamily="34" charset="-122"/>
+              </a:rPr>
+              <a:t>“Europe”</a:t>
+            </a:r>
+            <a:r>
+              <a:rPr lang="zh-CN" altLang="en-US" dirty="0" smtClean="0">
+                <a:latin typeface="微软雅黑" panose="020B0503020204020204" pitchFamily="34" charset="-122"/>
+                <a:ea typeface="微软雅黑" panose="020B0503020204020204" pitchFamily="34" charset="-122"/>
+                <a:cs typeface="微软雅黑" panose="020B0503020204020204" pitchFamily="34" charset="-122"/>
+              </a:rPr>
+              <a:t>区域中</a:t>
+            </a:r>
+            <a:r>
+              <a:rPr lang="en-US" altLang="zh-CN" dirty="0" smtClean="0">
+                <a:latin typeface="微软雅黑" panose="020B0503020204020204" pitchFamily="34" charset="-122"/>
+                <a:ea typeface="微软雅黑" panose="020B0503020204020204" pitchFamily="34" charset="-122"/>
+                <a:cs typeface="微软雅黑" panose="020B0503020204020204" pitchFamily="34" charset="-122"/>
+              </a:rPr>
+              <a:t>2024</a:t>
+            </a:r>
+            <a:r>
+              <a:rPr lang="zh-CN" altLang="en-US" dirty="0" smtClean="0">
+                <a:latin typeface="微软雅黑" panose="020B0503020204020204" pitchFamily="34" charset="-122"/>
+                <a:ea typeface="微软雅黑" panose="020B0503020204020204" pitchFamily="34" charset="-122"/>
+                <a:cs typeface="微软雅黑" panose="020B0503020204020204" pitchFamily="34" charset="-122"/>
+              </a:rPr>
+              <a:t>年</a:t>
+            </a:r>
+            <a:r>
+              <a:rPr lang="en-US" altLang="zh-CN" dirty="0" smtClean="0">
+                <a:latin typeface="微软雅黑" panose="020B0503020204020204" pitchFamily="34" charset="-122"/>
+                <a:ea typeface="微软雅黑" panose="020B0503020204020204" pitchFamily="34" charset="-122"/>
+                <a:cs typeface="微软雅黑" panose="020B0503020204020204" pitchFamily="34" charset="-122"/>
+              </a:rPr>
+              <a:t>“ev_sales_share”</a:t>
+            </a:r>
+            <a:r>
+              <a:rPr lang="zh-CN" altLang="en-US" dirty="0" smtClean="0">
+                <a:latin typeface="微软雅黑" panose="020B0503020204020204" pitchFamily="34" charset="-122"/>
+                <a:ea typeface="微软雅黑" panose="020B0503020204020204" pitchFamily="34" charset="-122"/>
+                <a:cs typeface="微软雅黑" panose="020B0503020204020204" pitchFamily="34" charset="-122"/>
+              </a:rPr>
+              <a:t>的前</a:t>
+            </a:r>
+            <a:r>
+              <a:rPr lang="en-US" altLang="zh-CN" dirty="0" smtClean="0">
+                <a:latin typeface="微软雅黑" panose="020B0503020204020204" pitchFamily="34" charset="-122"/>
+                <a:ea typeface="微软雅黑" panose="020B0503020204020204" pitchFamily="34" charset="-122"/>
+                <a:cs typeface="微软雅黑" panose="020B0503020204020204" pitchFamily="34" charset="-122"/>
+              </a:rPr>
+              <a:t>5</a:t>
+            </a:r>
+            <a:r>
+              <a:rPr lang="zh-CN" altLang="en-US" dirty="0" smtClean="0">
+                <a:latin typeface="微软雅黑" panose="020B0503020204020204" pitchFamily="34" charset="-122"/>
+                <a:ea typeface="微软雅黑" panose="020B0503020204020204" pitchFamily="34" charset="-122"/>
+                <a:cs typeface="微软雅黑" panose="020B0503020204020204" pitchFamily="34" charset="-122"/>
+              </a:rPr>
+              <a:t>名，并以简报形式描述结果。实现这一功能的核心是排序，即从限定条件的数据集中，找出</a:t>
+            </a:r>
+            <a:r>
+              <a:rPr lang="en-US" altLang="zh-CN" dirty="0" smtClean="0">
+                <a:latin typeface="微软雅黑" panose="020B0503020204020204" pitchFamily="34" charset="-122"/>
+                <a:ea typeface="微软雅黑" panose="020B0503020204020204" pitchFamily="34" charset="-122"/>
+                <a:cs typeface="微软雅黑" panose="020B0503020204020204" pitchFamily="34" charset="-122"/>
+              </a:rPr>
+              <a:t>“ev_sales_share”</a:t>
+            </a:r>
+            <a:r>
+              <a:rPr lang="zh-CN" altLang="en-US" dirty="0" smtClean="0">
+                <a:latin typeface="微软雅黑" panose="020B0503020204020204" pitchFamily="34" charset="-122"/>
+                <a:ea typeface="微软雅黑" panose="020B0503020204020204" pitchFamily="34" charset="-122"/>
+                <a:cs typeface="微软雅黑" panose="020B0503020204020204" pitchFamily="34" charset="-122"/>
+              </a:rPr>
+              <a:t>字段值最高的前</a:t>
+            </a:r>
+            <a:r>
+              <a:rPr lang="en-US" altLang="zh-CN" dirty="0" smtClean="0">
+                <a:latin typeface="微软雅黑" panose="020B0503020204020204" pitchFamily="34" charset="-122"/>
+                <a:ea typeface="微软雅黑" panose="020B0503020204020204" pitchFamily="34" charset="-122"/>
+                <a:cs typeface="微软雅黑" panose="020B0503020204020204" pitchFamily="34" charset="-122"/>
+              </a:rPr>
+              <a:t>5</a:t>
+            </a:r>
+            <a:r>
+              <a:rPr lang="zh-CN" altLang="en-US" dirty="0" smtClean="0">
+                <a:latin typeface="微软雅黑" panose="020B0503020204020204" pitchFamily="34" charset="-122"/>
+                <a:ea typeface="微软雅黑" panose="020B0503020204020204" pitchFamily="34" charset="-122"/>
+                <a:cs typeface="微软雅黑" panose="020B0503020204020204" pitchFamily="34" charset="-122"/>
+              </a:rPr>
+              <a:t>条记录。</a:t>
+            </a:r>
+            <a:endParaRPr lang="zh-CN" altLang="en-US" dirty="0" smtClean="0">
+              <a:latin typeface="微软雅黑" panose="020B0503020204020204" pitchFamily="34" charset="-122"/>
+              <a:ea typeface="微软雅黑" panose="020B0503020204020204" pitchFamily="34" charset="-122"/>
+              <a:cs typeface="微软雅黑" panose="020B0503020204020204" pitchFamily="34" charset="-122"/>
+            </a:endParaRPr>
+          </a:p>
+        </p:txBody>
+      </p:sp>
+      <p:sp>
+        <p:nvSpPr>
+          <p:cNvPr id="6" name="矩形 5"/>
+          <p:cNvSpPr/>
+          <p:nvPr/>
+        </p:nvSpPr>
+        <p:spPr>
+          <a:xfrm>
+            <a:off x="1954896" y="3657124"/>
+            <a:ext cx="8211454" cy="2991484"/>
+          </a:xfrm>
+          <a:prstGeom prst="rect">
+            <a:avLst/>
+          </a:prstGeom>
+          <a:noFill/>
+        </p:spPr>
+        <p:style>
+          <a:lnRef idx="2">
+            <a:schemeClr val="accent1">
+              <a:shade val="50000"/>
+            </a:schemeClr>
+          </a:lnRef>
+          <a:fillRef idx="1">
+            <a:schemeClr val="accent1"/>
+          </a:fillRef>
+          <a:effectRef idx="0">
+            <a:schemeClr val="accent1"/>
+          </a:effectRef>
+          <a:fontRef idx="minor">
+            <a:schemeClr val="lt1"/>
+          </a:fontRef>
+        </p:style>
+        <p:txBody>
+          <a:bodyPr rtlCol="0" anchor="ctr"/>
+          <a:lstStyle/>
+          <a:p>
+            <a:pPr algn="ctr"/>
+            <a:r>
+              <a:rPr lang="zh-CN" altLang="en-US" dirty="0">
+                <a:solidFill>
+                  <a:schemeClr val="tx1"/>
+                </a:solidFill>
+              </a:rPr>
+              <a:t>教材对步骤图片</a:t>
+            </a:r>
+            <a:endParaRPr lang="zh-CN" altLang="en-US" dirty="0">
+              <a:solidFill>
+                <a:schemeClr val="tx1"/>
+              </a:solidFill>
+            </a:endParaRPr>
+          </a:p>
+        </p:txBody>
+      </p:sp>
+      <p:sp>
+        <p:nvSpPr>
           <p:cNvPr id="2" name="文本框 1"/>
+          <p:cNvSpPr txBox="1"/>
+          <p:nvPr/>
+        </p:nvSpPr>
+        <p:spPr>
+          <a:xfrm>
+            <a:off x="0" y="793750"/>
+            <a:ext cx="1351262" cy="583565"/>
+          </a:xfrm>
+          <a:prstGeom prst="rect">
+            <a:avLst/>
+          </a:prstGeom>
+          <a:noFill/>
+        </p:spPr>
+        <p:txBody>
+          <a:bodyPr wrap="square" rtlCol="0">
+            <a:spAutoFit/>
+            <a:scene3d>
+              <a:camera prst="orthographicFront"/>
+              <a:lightRig rig="threePt" dir="t"/>
+            </a:scene3d>
+            <a:sp3d contourW="12700"/>
+          </a:bodyPr>
+          <a:lstStyle/>
+          <a:p>
+            <a:pPr algn="ctr"/>
+            <a:r>
+              <a:rPr lang="en-US" sz="3200" dirty="0" smtClean="0">
+                <a:solidFill>
+                  <a:srgbClr val="3F396C"/>
+                </a:solidFill>
+                <a:latin typeface="思源宋体" panose="02020700000000000000" charset="-122"/>
+                <a:ea typeface="思源宋体" panose="02020700000000000000" charset="-122"/>
+              </a:rPr>
+              <a:t>04</a:t>
+            </a:r>
+            <a:endParaRPr lang="en-US" sz="3200" dirty="0" smtClean="0">
+              <a:solidFill>
+                <a:srgbClr val="3F396C"/>
+              </a:solidFill>
+              <a:latin typeface="思源宋体" panose="02020700000000000000" charset="-122"/>
+              <a:ea typeface="思源宋体" panose="02020700000000000000" charset="-122"/>
+            </a:endParaRPr>
+          </a:p>
+        </p:txBody>
+      </p:sp>
+      <p:sp>
+        <p:nvSpPr>
+          <p:cNvPr id="17" name="文本框 16"/>
+          <p:cNvSpPr txBox="1"/>
+          <p:nvPr/>
+        </p:nvSpPr>
+        <p:spPr>
+          <a:xfrm>
+            <a:off x="1278000" y="792000"/>
+            <a:ext cx="3932555" cy="583565"/>
+          </a:xfrm>
+          <a:prstGeom prst="rect">
+            <a:avLst/>
+          </a:prstGeom>
+          <a:noFill/>
+        </p:spPr>
+        <p:txBody>
+          <a:bodyPr wrap="square" rtlCol="0">
+            <a:spAutoFit/>
+            <a:scene3d>
+              <a:camera prst="orthographicFront"/>
+              <a:lightRig rig="threePt" dir="t"/>
+            </a:scene3d>
+            <a:sp3d contourW="12700"/>
+          </a:bodyPr>
+          <a:lstStyle>
+            <a:defPPr>
+              <a:defRPr lang="en-US"/>
+            </a:defPPr>
+            <a:lvl1pPr algn="ctr">
+              <a:defRPr sz="3200">
+                <a:gradFill>
+                  <a:gsLst>
+                    <a:gs pos="0">
+                      <a:schemeClr val="tx1">
+                        <a:lumMod val="50000"/>
+                        <a:lumOff val="50000"/>
+                      </a:schemeClr>
+                    </a:gs>
+                    <a:gs pos="100000">
+                      <a:schemeClr val="tx1">
+                        <a:lumMod val="85000"/>
+                        <a:lumOff val="15000"/>
+                      </a:schemeClr>
+                    </a:gs>
+                  </a:gsLst>
+                  <a:lin ang="5400000" scaled="1"/>
+                </a:gradFill>
+              </a:defRPr>
+            </a:lvl1pPr>
+          </a:lstStyle>
+          <a:p>
+            <a:pPr marL="0" marR="0" lvl="0" indent="0" algn="l" defTabSz="914400" rtl="0" eaLnBrk="1" fontAlgn="auto" latinLnBrk="0" hangingPunct="1">
+              <a:lnSpc>
+                <a:spcPct val="100000"/>
+              </a:lnSpc>
+              <a:spcBef>
+                <a:spcPts val="0"/>
+              </a:spcBef>
+              <a:spcAft>
+                <a:spcPts val="0"/>
+              </a:spcAft>
+              <a:buClrTx/>
+              <a:buSzTx/>
+              <a:buFontTx/>
+              <a:buNone/>
+              <a:defRPr/>
+            </a:pPr>
+            <a:r>
+              <a:rPr lang="zh-CN" altLang="en-US" b="1" dirty="0">
+                <a:solidFill>
+                  <a:schemeClr val="accent1">
+                    <a:lumMod val="75000"/>
+                  </a:schemeClr>
+                </a:solidFill>
+                <a:latin typeface="微软雅黑" panose="020B0503020204020204" pitchFamily="34" charset="-122"/>
+                <a:ea typeface="微软雅黑" panose="020B0503020204020204" pitchFamily="34" charset="-122"/>
+                <a:cs typeface="微软雅黑" panose="020B0503020204020204" pitchFamily="34" charset="-122"/>
+                <a:sym typeface="+mn-lt"/>
+              </a:rPr>
+              <a:t>任务</a:t>
+            </a:r>
+            <a:r>
+              <a:rPr lang="zh-CN" altLang="en-US" b="1" dirty="0">
+                <a:solidFill>
+                  <a:schemeClr val="accent1">
+                    <a:lumMod val="75000"/>
+                  </a:schemeClr>
+                </a:solidFill>
+                <a:latin typeface="微软雅黑" panose="020B0503020204020204" pitchFamily="34" charset="-122"/>
+                <a:ea typeface="微软雅黑" panose="020B0503020204020204" pitchFamily="34" charset="-122"/>
+                <a:cs typeface="微软雅黑" panose="020B0503020204020204" pitchFamily="34" charset="-122"/>
+                <a:sym typeface="+mn-lt"/>
+              </a:rPr>
+              <a:t>实施</a:t>
+            </a:r>
+            <a:endParaRPr lang="zh-CN" altLang="en-US" b="1" dirty="0">
+              <a:solidFill>
+                <a:schemeClr val="accent1">
+                  <a:lumMod val="75000"/>
+                </a:schemeClr>
+              </a:solidFill>
+              <a:latin typeface="微软雅黑" panose="020B0503020204020204" pitchFamily="34" charset="-122"/>
+              <a:ea typeface="微软雅黑" panose="020B0503020204020204" pitchFamily="34" charset="-122"/>
+              <a:cs typeface="微软雅黑" panose="020B0503020204020204" pitchFamily="34" charset="-122"/>
+              <a:sym typeface="+mn-lt"/>
+            </a:endParaRPr>
+          </a:p>
+        </p:txBody>
+      </p:sp>
+    </p:spTree>
+  </p:cSld>
+  <p:clrMapOvr>
+    <a:masterClrMapping/>
+  </p:clrMapOvr>
+</p:sld>
+</file>
+
+<file path=ppt/slides/slide9.xml><?xml version="1.0" encoding="utf-8"?>
+<p:sld xmlns:a="http://schemas.openxmlformats.org/drawingml/2006/main" xmlns:r="http://schemas.openxmlformats.org/officeDocument/2006/relationships" xmlns:p="http://schemas.openxmlformats.org/presentationml/2006/main">
+  <p:cSld>
+    <p:spTree>
+      <p:nvGrpSpPr>
+        <p:cNvPr id="1" name=""/>
+        <p:cNvGrpSpPr/>
+        <p:nvPr/>
+      </p:nvGrpSpPr>
+      <p:grpSpPr>
+        <a:xfrm>
+          <a:off x="0" y="0"/>
+          <a:ext cx="0" cy="0"/>
+          <a:chOff x="0" y="0"/>
+          <a:chExt cx="0" cy="0"/>
+        </a:xfrm>
+      </p:grpSpPr>
+      <p:sp>
+        <p:nvSpPr>
+          <p:cNvPr id="3" name="文本框 2"/>
+          <p:cNvSpPr txBox="1"/>
+          <p:nvPr/>
+        </p:nvSpPr>
+        <p:spPr>
+          <a:xfrm>
+            <a:off x="155575" y="1777365"/>
+            <a:ext cx="5502275" cy="4629150"/>
+          </a:xfrm>
+          <a:prstGeom prst="rect">
+            <a:avLst/>
+          </a:prstGeom>
+          <a:noFill/>
+        </p:spPr>
+        <p:txBody>
+          <a:bodyPr wrap="square" rtlCol="0" anchor="t">
+            <a:noAutofit/>
+          </a:bodyPr>
+          <a:lstStyle/>
+          <a:p>
+            <a:pPr indent="457200" fontAlgn="auto">
+              <a:lnSpc>
+                <a:spcPct val="150000"/>
+              </a:lnSpc>
+            </a:pPr>
+            <a:r>
+              <a:rPr lang="zh-CN" dirty="0" smtClean="0">
+                <a:latin typeface="微软雅黑" panose="020B0503020204020204" pitchFamily="34" charset="-122"/>
+                <a:ea typeface="微软雅黑" panose="020B0503020204020204" pitchFamily="34" charset="-122"/>
+                <a:cs typeface="微软雅黑" panose="020B0503020204020204" pitchFamily="34" charset="-122"/>
+              </a:rPr>
+              <a:t>为了实现这一功能，需要添加第二个代码节点，并分别将两个代码节点命名为</a:t>
+            </a:r>
+            <a:r>
+              <a:rPr lang="en-US" altLang="zh-CN" dirty="0" smtClean="0">
+                <a:latin typeface="微软雅黑" panose="020B0503020204020204" pitchFamily="34" charset="-122"/>
+                <a:ea typeface="微软雅黑" panose="020B0503020204020204" pitchFamily="34" charset="-122"/>
+                <a:cs typeface="微软雅黑" panose="020B0503020204020204" pitchFamily="34" charset="-122"/>
+              </a:rPr>
+              <a:t>“</a:t>
+            </a:r>
+            <a:r>
+              <a:rPr lang="zh-CN" altLang="en-US" dirty="0" smtClean="0">
+                <a:latin typeface="微软雅黑" panose="020B0503020204020204" pitchFamily="34" charset="-122"/>
+                <a:ea typeface="微软雅黑" panose="020B0503020204020204" pitchFamily="34" charset="-122"/>
+                <a:cs typeface="微软雅黑" panose="020B0503020204020204" pitchFamily="34" charset="-122"/>
+              </a:rPr>
+              <a:t>数据预处理</a:t>
+            </a:r>
+            <a:r>
+              <a:rPr lang="en-US" altLang="zh-CN" dirty="0" smtClean="0">
+                <a:latin typeface="微软雅黑" panose="020B0503020204020204" pitchFamily="34" charset="-122"/>
+                <a:ea typeface="微软雅黑" panose="020B0503020204020204" pitchFamily="34" charset="-122"/>
+                <a:cs typeface="微软雅黑" panose="020B0503020204020204" pitchFamily="34" charset="-122"/>
+              </a:rPr>
+              <a:t>”</a:t>
+            </a:r>
+            <a:r>
+              <a:rPr lang="zh-CN" altLang="en-US" dirty="0" smtClean="0">
+                <a:latin typeface="微软雅黑" panose="020B0503020204020204" pitchFamily="34" charset="-122"/>
+                <a:ea typeface="微软雅黑" panose="020B0503020204020204" pitchFamily="34" charset="-122"/>
+                <a:cs typeface="微软雅黑" panose="020B0503020204020204" pitchFamily="34" charset="-122"/>
+              </a:rPr>
+              <a:t>和</a:t>
+            </a:r>
+            <a:r>
+              <a:rPr lang="en-US" altLang="zh-CN" dirty="0" smtClean="0">
+                <a:latin typeface="微软雅黑" panose="020B0503020204020204" pitchFamily="34" charset="-122"/>
+                <a:ea typeface="微软雅黑" panose="020B0503020204020204" pitchFamily="34" charset="-122"/>
+                <a:cs typeface="微软雅黑" panose="020B0503020204020204" pitchFamily="34" charset="-122"/>
+              </a:rPr>
+              <a:t>“</a:t>
+            </a:r>
+            <a:r>
+              <a:rPr lang="zh-CN" altLang="en-US" dirty="0" smtClean="0">
+                <a:latin typeface="微软雅黑" panose="020B0503020204020204" pitchFamily="34" charset="-122"/>
+                <a:ea typeface="微软雅黑" panose="020B0503020204020204" pitchFamily="34" charset="-122"/>
+                <a:cs typeface="微软雅黑" panose="020B0503020204020204" pitchFamily="34" charset="-122"/>
+              </a:rPr>
+              <a:t>数据排序</a:t>
+            </a:r>
+            <a:r>
+              <a:rPr lang="en-US" altLang="zh-CN" dirty="0" smtClean="0">
+                <a:latin typeface="微软雅黑" panose="020B0503020204020204" pitchFamily="34" charset="-122"/>
+                <a:ea typeface="微软雅黑" panose="020B0503020204020204" pitchFamily="34" charset="-122"/>
+                <a:cs typeface="微软雅黑" panose="020B0503020204020204" pitchFamily="34" charset="-122"/>
+              </a:rPr>
+              <a:t>”</a:t>
+            </a:r>
+            <a:r>
+              <a:rPr lang="zh-CN" altLang="en-US" dirty="0" smtClean="0">
+                <a:latin typeface="微软雅黑" panose="020B0503020204020204" pitchFamily="34" charset="-122"/>
+                <a:ea typeface="微软雅黑" panose="020B0503020204020204" pitchFamily="34" charset="-122"/>
+                <a:cs typeface="微软雅黑" panose="020B0503020204020204" pitchFamily="34" charset="-122"/>
+              </a:rPr>
+              <a:t>。在</a:t>
+            </a:r>
+            <a:r>
+              <a:rPr lang="en-US" altLang="zh-CN" dirty="0" smtClean="0">
+                <a:latin typeface="微软雅黑" panose="020B0503020204020204" pitchFamily="34" charset="-122"/>
+                <a:ea typeface="微软雅黑" panose="020B0503020204020204" pitchFamily="34" charset="-122"/>
+                <a:cs typeface="微软雅黑" panose="020B0503020204020204" pitchFamily="34" charset="-122"/>
+              </a:rPr>
+              <a:t>“</a:t>
+            </a:r>
+            <a:r>
+              <a:rPr lang="zh-CN" altLang="en-US" dirty="0" smtClean="0">
+                <a:latin typeface="微软雅黑" panose="020B0503020204020204" pitchFamily="34" charset="-122"/>
+                <a:ea typeface="微软雅黑" panose="020B0503020204020204" pitchFamily="34" charset="-122"/>
+                <a:cs typeface="微软雅黑" panose="020B0503020204020204" pitchFamily="34" charset="-122"/>
+              </a:rPr>
+              <a:t>数据排序</a:t>
+            </a:r>
+            <a:r>
+              <a:rPr lang="en-US" altLang="zh-CN" dirty="0" smtClean="0">
+                <a:latin typeface="微软雅黑" panose="020B0503020204020204" pitchFamily="34" charset="-122"/>
+                <a:ea typeface="微软雅黑" panose="020B0503020204020204" pitchFamily="34" charset="-122"/>
+                <a:cs typeface="微软雅黑" panose="020B0503020204020204" pitchFamily="34" charset="-122"/>
+              </a:rPr>
+              <a:t>”</a:t>
+            </a:r>
+            <a:r>
+              <a:rPr lang="zh-CN" altLang="en-US" dirty="0" smtClean="0">
+                <a:latin typeface="微软雅黑" panose="020B0503020204020204" pitchFamily="34" charset="-122"/>
+                <a:ea typeface="微软雅黑" panose="020B0503020204020204" pitchFamily="34" charset="-122"/>
+                <a:cs typeface="微软雅黑" panose="020B0503020204020204" pitchFamily="34" charset="-122"/>
+              </a:rPr>
+              <a:t>节点中，编写筛选和排序代码，并正确设置输入输出变量及其类型。执行后，即可获取到分析所需的特定数据。接下来，需要将这些数据整理成一篇简报文稿，因此需要添加一个智能体节点，并配合系统提示词来生成简报。值得注意的是，</a:t>
+            </a:r>
+            <a:r>
+              <a:rPr lang="en-US" altLang="zh-CN" dirty="0" smtClean="0">
+                <a:latin typeface="微软雅黑" panose="020B0503020204020204" pitchFamily="34" charset="-122"/>
+                <a:ea typeface="微软雅黑" panose="020B0503020204020204" pitchFamily="34" charset="-122"/>
+                <a:cs typeface="微软雅黑" panose="020B0503020204020204" pitchFamily="34" charset="-122"/>
+              </a:rPr>
+              <a:t>“</a:t>
+            </a:r>
+            <a:r>
+              <a:rPr lang="zh-CN" altLang="en-US" dirty="0" smtClean="0">
+                <a:latin typeface="微软雅黑" panose="020B0503020204020204" pitchFamily="34" charset="-122"/>
+                <a:ea typeface="微软雅黑" panose="020B0503020204020204" pitchFamily="34" charset="-122"/>
+                <a:cs typeface="微软雅黑" panose="020B0503020204020204" pitchFamily="34" charset="-122"/>
+              </a:rPr>
+              <a:t>数据排序</a:t>
+            </a:r>
+            <a:r>
+              <a:rPr lang="en-US" altLang="zh-CN" dirty="0" smtClean="0">
+                <a:latin typeface="微软雅黑" panose="020B0503020204020204" pitchFamily="34" charset="-122"/>
+                <a:ea typeface="微软雅黑" panose="020B0503020204020204" pitchFamily="34" charset="-122"/>
+                <a:cs typeface="微软雅黑" panose="020B0503020204020204" pitchFamily="34" charset="-122"/>
+              </a:rPr>
+              <a:t>”</a:t>
+            </a:r>
+            <a:r>
+              <a:rPr lang="zh-CN" altLang="en-US" dirty="0" smtClean="0">
+                <a:latin typeface="微软雅黑" panose="020B0503020204020204" pitchFamily="34" charset="-122"/>
+                <a:ea typeface="微软雅黑" panose="020B0503020204020204" pitchFamily="34" charset="-122"/>
+                <a:cs typeface="微软雅黑" panose="020B0503020204020204" pitchFamily="34" charset="-122"/>
+              </a:rPr>
+              <a:t>节点会返回两个结果：一个是</a:t>
+            </a:r>
+            <a:r>
+              <a:rPr lang="en-US" altLang="zh-CN" dirty="0" smtClean="0">
+                <a:latin typeface="微软雅黑" panose="020B0503020204020204" pitchFamily="34" charset="-122"/>
+                <a:ea typeface="微软雅黑" panose="020B0503020204020204" pitchFamily="34" charset="-122"/>
+                <a:cs typeface="微软雅黑" panose="020B0503020204020204" pitchFamily="34" charset="-122"/>
+              </a:rPr>
+              <a:t>Object</a:t>
+            </a:r>
+            <a:r>
+              <a:rPr lang="zh-CN" altLang="en-US" dirty="0" smtClean="0">
+                <a:latin typeface="微软雅黑" panose="020B0503020204020204" pitchFamily="34" charset="-122"/>
+                <a:ea typeface="微软雅黑" panose="020B0503020204020204" pitchFamily="34" charset="-122"/>
+                <a:cs typeface="微软雅黑" panose="020B0503020204020204" pitchFamily="34" charset="-122"/>
+              </a:rPr>
+              <a:t>格式的</a:t>
+            </a:r>
+            <a:r>
+              <a:rPr lang="en-US" altLang="zh-CN" dirty="0" smtClean="0">
+                <a:latin typeface="微软雅黑" panose="020B0503020204020204" pitchFamily="34" charset="-122"/>
+                <a:ea typeface="微软雅黑" panose="020B0503020204020204" pitchFamily="34" charset="-122"/>
+                <a:cs typeface="微软雅黑" panose="020B0503020204020204" pitchFamily="34" charset="-122"/>
+              </a:rPr>
+              <a:t>“result”</a:t>
+            </a:r>
+            <a:r>
+              <a:rPr lang="zh-CN" altLang="en-US" dirty="0" smtClean="0">
+                <a:latin typeface="微软雅黑" panose="020B0503020204020204" pitchFamily="34" charset="-122"/>
+                <a:ea typeface="微软雅黑" panose="020B0503020204020204" pitchFamily="34" charset="-122"/>
+                <a:cs typeface="微软雅黑" panose="020B0503020204020204" pitchFamily="34" charset="-122"/>
+              </a:rPr>
+              <a:t>，另一个是</a:t>
+            </a:r>
+            <a:r>
+              <a:rPr lang="en-US" altLang="zh-CN" dirty="0" smtClean="0">
+                <a:latin typeface="微软雅黑" panose="020B0503020204020204" pitchFamily="34" charset="-122"/>
+                <a:ea typeface="微软雅黑" panose="020B0503020204020204" pitchFamily="34" charset="-122"/>
+                <a:cs typeface="微软雅黑" panose="020B0503020204020204" pitchFamily="34" charset="-122"/>
+              </a:rPr>
+              <a:t>String</a:t>
+            </a:r>
+            <a:r>
+              <a:rPr lang="zh-CN" altLang="en-US" dirty="0" smtClean="0">
+                <a:latin typeface="微软雅黑" panose="020B0503020204020204" pitchFamily="34" charset="-122"/>
+                <a:ea typeface="微软雅黑" panose="020B0503020204020204" pitchFamily="34" charset="-122"/>
+                <a:cs typeface="微软雅黑" panose="020B0503020204020204" pitchFamily="34" charset="-122"/>
+              </a:rPr>
+              <a:t>格式的</a:t>
+            </a:r>
+            <a:r>
+              <a:rPr lang="en-US" altLang="zh-CN" dirty="0" smtClean="0">
+                <a:latin typeface="微软雅黑" panose="020B0503020204020204" pitchFamily="34" charset="-122"/>
+                <a:ea typeface="微软雅黑" panose="020B0503020204020204" pitchFamily="34" charset="-122"/>
+                <a:cs typeface="微软雅黑" panose="020B0503020204020204" pitchFamily="34" charset="-122"/>
+              </a:rPr>
+              <a:t>“content”</a:t>
+            </a:r>
+            <a:r>
+              <a:rPr lang="zh-CN" altLang="en-US" dirty="0" smtClean="0">
+                <a:latin typeface="微软雅黑" panose="020B0503020204020204" pitchFamily="34" charset="-122"/>
+                <a:ea typeface="微软雅黑" panose="020B0503020204020204" pitchFamily="34" charset="-122"/>
+                <a:cs typeface="微软雅黑" panose="020B0503020204020204" pitchFamily="34" charset="-122"/>
+              </a:rPr>
+              <a:t>。如果需要被代码进一步处理，使用</a:t>
+            </a:r>
+            <a:r>
+              <a:rPr lang="en-US" altLang="zh-CN" dirty="0" smtClean="0">
+                <a:latin typeface="微软雅黑" panose="020B0503020204020204" pitchFamily="34" charset="-122"/>
+                <a:ea typeface="微软雅黑" panose="020B0503020204020204" pitchFamily="34" charset="-122"/>
+                <a:cs typeface="微软雅黑" panose="020B0503020204020204" pitchFamily="34" charset="-122"/>
+              </a:rPr>
+              <a:t>Object</a:t>
+            </a:r>
+            <a:r>
+              <a:rPr lang="zh-CN" altLang="en-US" dirty="0" smtClean="0">
+                <a:latin typeface="微软雅黑" panose="020B0503020204020204" pitchFamily="34" charset="-122"/>
+                <a:ea typeface="微软雅黑" panose="020B0503020204020204" pitchFamily="34" charset="-122"/>
+                <a:cs typeface="微软雅黑" panose="020B0503020204020204" pitchFamily="34" charset="-122"/>
+              </a:rPr>
+              <a:t>格式更便于调整；但如果要被内置的条件节点、回复节点或智能体节点调用，使用</a:t>
+            </a:r>
+            <a:r>
+              <a:rPr lang="en-US" altLang="zh-CN" dirty="0" smtClean="0">
+                <a:latin typeface="微软雅黑" panose="020B0503020204020204" pitchFamily="34" charset="-122"/>
+                <a:ea typeface="微软雅黑" panose="020B0503020204020204" pitchFamily="34" charset="-122"/>
+                <a:cs typeface="微软雅黑" panose="020B0503020204020204" pitchFamily="34" charset="-122"/>
+              </a:rPr>
+              <a:t>String</a:t>
+            </a:r>
+            <a:r>
+              <a:rPr lang="zh-CN" altLang="en-US" dirty="0" smtClean="0">
+                <a:latin typeface="微软雅黑" panose="020B0503020204020204" pitchFamily="34" charset="-122"/>
+                <a:ea typeface="微软雅黑" panose="020B0503020204020204" pitchFamily="34" charset="-122"/>
+                <a:cs typeface="微软雅黑" panose="020B0503020204020204" pitchFamily="34" charset="-122"/>
+              </a:rPr>
+              <a:t>格式变量则更容易被这些节点直接理解和接受。</a:t>
+            </a:r>
+            <a:endParaRPr lang="zh-CN" altLang="en-US" dirty="0" smtClean="0">
+              <a:latin typeface="微软雅黑" panose="020B0503020204020204" pitchFamily="34" charset="-122"/>
+              <a:ea typeface="微软雅黑" panose="020B0503020204020204" pitchFamily="34" charset="-122"/>
+              <a:cs typeface="微软雅黑" panose="020B0503020204020204" pitchFamily="34" charset="-122"/>
+            </a:endParaRPr>
+          </a:p>
+        </p:txBody>
+      </p:sp>
+      <p:sp>
+        <p:nvSpPr>
+          <p:cNvPr id="6" name="矩形 5"/>
+          <p:cNvSpPr/>
+          <p:nvPr/>
+        </p:nvSpPr>
+        <p:spPr>
+          <a:xfrm>
+            <a:off x="5797550" y="1776888"/>
+            <a:ext cx="5911850" cy="4630261"/>
+          </a:xfrm>
+          <a:prstGeom prst="rect">
+            <a:avLst/>
+          </a:prstGeom>
+          <a:noFill/>
+        </p:spPr>
+        <p:style>
+          <a:lnRef idx="2">
+            <a:schemeClr val="accent1">
+              <a:shade val="50000"/>
+            </a:schemeClr>
+          </a:lnRef>
+          <a:fillRef idx="1">
+            <a:schemeClr val="accent1"/>
+          </a:fillRef>
+          <a:effectRef idx="0">
+            <a:schemeClr val="accent1"/>
+          </a:effectRef>
+          <a:fontRef idx="minor">
+            <a:schemeClr val="lt1"/>
+          </a:fontRef>
+        </p:style>
+        <p:txBody>
+          <a:bodyPr rtlCol="0" anchor="ctr"/>
+          <a:lstStyle/>
+          <a:p>
+            <a:pPr algn="ctr"/>
+            <a:r>
+              <a:rPr lang="zh-CN" altLang="en-US" dirty="0" smtClean="0">
+                <a:solidFill>
+                  <a:schemeClr val="tx1"/>
+                </a:solidFill>
+              </a:rPr>
+              <a:t>教材对步骤图片</a:t>
+            </a:r>
+            <a:endParaRPr lang="zh-CN" altLang="en-US" dirty="0">
+              <a:solidFill>
+                <a:schemeClr val="tx1"/>
+              </a:solidFill>
+            </a:endParaRPr>
+          </a:p>
+        </p:txBody>
+      </p:sp>
+      <p:sp>
+        <p:nvSpPr>
+          <p:cNvPr id="4" name="文本框 3"/>
           <p:cNvSpPr txBox="1"/>
           <p:nvPr/>
         </p:nvSpPr>
@@ -11448,61 +12185,44 @@
 
 <file path=ppt/tags/tag70.xml><?xml version="1.0" encoding="utf-8"?>
 <p:tagLst xmlns:p="http://schemas.openxmlformats.org/presentationml/2006/main">
-  <p:tag name="KSO_WM_DIAGRAM_VIRTUALLY_FRAME" val="{&quot;height&quot;:333.7,&quot;left&quot;:181.0367716535433,&quot;top&quot;:150.5,&quot;width&quot;:585.2126771653544}"/>
+  <p:tag name="KSO_WM_DIAGRAM_VIRTUALLY_FRAME" val="{&quot;height&quot;:333.7,&quot;left&quot;:116.85,&quot;top&quot;:150.5,&quot;width&quot;:710.2425984251968}"/>
 </p:tagLst>
 </file>
 
 <file path=ppt/tags/tag71.xml><?xml version="1.0" encoding="utf-8"?>
 <p:tagLst xmlns:p="http://schemas.openxmlformats.org/presentationml/2006/main">
-  <p:tag name="KSO_WM_DIAGRAM_VIRTUALLY_FRAME" val="{&quot;height&quot;:333.6891855480546,&quot;left&quot;:181.0367716535433,&quot;top&quot;:150.5,&quot;width&quot;:585.2126771653544}"/>
+  <p:tag name="KSO_WM_DIAGRAM_VIRTUALLY_FRAME" val="{&quot;height&quot;:333.7,&quot;left&quot;:116.85,&quot;top&quot;:150.5,&quot;width&quot;:710.2425984251968}"/>
 </p:tagLst>
 </file>
 
 <file path=ppt/tags/tag72.xml><?xml version="1.0" encoding="utf-8"?>
 <p:tagLst xmlns:p="http://schemas.openxmlformats.org/presentationml/2006/main">
-  <p:tag name="KSO_WM_DIAGRAM_VIRTUALLY_FRAME" val="{&quot;height&quot;:333.7,&quot;left&quot;:181.0367716535433,&quot;top&quot;:150.5,&quot;width&quot;:585.2126771653544}"/>
+  <p:tag name="KSO_WM_DIAGRAM_VIRTUALLY_FRAME" val="{&quot;height&quot;:333.7,&quot;left&quot;:116.85,&quot;top&quot;:150.5,&quot;width&quot;:710.2425984251968}"/>
 </p:tagLst>
 </file>
 
 <file path=ppt/tags/tag73.xml><?xml version="1.0" encoding="utf-8"?>
 <p:tagLst xmlns:p="http://schemas.openxmlformats.org/presentationml/2006/main">
-  <p:tag name="KSO_WM_DIAGRAM_VIRTUALLY_FRAME" val="{&quot;height&quot;:333.7,&quot;left&quot;:181.0367716535433,&quot;top&quot;:150.5,&quot;width&quot;:585.2126771653544}"/>
+  <p:tag name="KSO_WM_DIAGRAM_VIRTUALLY_FRAME" val="{&quot;height&quot;:333.7,&quot;left&quot;:116.85,&quot;top&quot;:150.5,&quot;width&quot;:710.2425984251968}"/>
 </p:tagLst>
 </file>
 
 <file path=ppt/tags/tag74.xml><?xml version="1.0" encoding="utf-8"?>
 <p:tagLst xmlns:p="http://schemas.openxmlformats.org/presentationml/2006/main">
-  <p:tag name="KSO_WM_DIAGRAM_VIRTUALLY_FRAME" val="{&quot;height&quot;:333.7,&quot;left&quot;:181.0367716535433,&quot;top&quot;:150.5,&quot;width&quot;:585.2126771653544}"/>
+  <p:tag name="KSO_WM_DIAGRAM_VIRTUALLY_FRAME" val="{&quot;height&quot;:333.7,&quot;left&quot;:116.85,&quot;top&quot;:150.5,&quot;width&quot;:710.2425984251968}"/>
 </p:tagLst>
 </file>
 
 <file path=ppt/tags/tag75.xml><?xml version="1.0" encoding="utf-8"?>
 <p:tagLst xmlns:p="http://schemas.openxmlformats.org/presentationml/2006/main">
-  <p:tag name="KSO_WM_DIAGRAM_VIRTUALLY_FRAME" val="{&quot;height&quot;:333.7,&quot;left&quot;:181.0367716535433,&quot;top&quot;:150.5,&quot;width&quot;:585.2126771653544}"/>
+  <p:tag name="KSO_WM_DIAGRAM_VIRTUALLY_FRAME" val="{&quot;height&quot;:333.7,&quot;left&quot;:116.85,&quot;top&quot;:150.5,&quot;width&quot;:710.2425984251968}"/>
 </p:tagLst>
 </file>
 
 <file path=ppt/tags/tag76.xml><?xml version="1.0" encoding="utf-8"?>
 <p:tagLst xmlns:p="http://schemas.openxmlformats.org/presentationml/2006/main">
-  <p:tag name="KSO_WM_DIAGRAM_VIRTUALLY_FRAME" val="{&quot;height&quot;:333.7,&quot;left&quot;:181.0367716535433,&quot;top&quot;:150.5,&quot;width&quot;:585.2126771653544}"/>
-</p:tagLst>
-</file>
-
-<file path=ppt/tags/tag77.xml><?xml version="1.0" encoding="utf-8"?>
-<p:tagLst xmlns:p="http://schemas.openxmlformats.org/presentationml/2006/main">
-  <p:tag name="KSO_WM_DIAGRAM_VIRTUALLY_FRAME" val="{&quot;height&quot;:333.6891855480546,&quot;left&quot;:181.0367716535433,&quot;top&quot;:150.5,&quot;width&quot;:585.2126771653544}"/>
-</p:tagLst>
-</file>
-
-<file path=ppt/tags/tag78.xml><?xml version="1.0" encoding="utf-8"?>
-<p:tagLst xmlns:p="http://schemas.openxmlformats.org/presentationml/2006/main">
-  <p:tag name="KSO_WM_DIAGRAM_VIRTUALLY_FRAME" val="{&quot;height&quot;:333.7,&quot;left&quot;:181.0367716535433,&quot;top&quot;:150.5,&quot;width&quot;:585.2126771653544}"/>
-</p:tagLst>
-</file>
-
-<file path=ppt/tags/tag79.xml><?xml version="1.0" encoding="utf-8"?>
-<p:tagLst xmlns:p="http://schemas.openxmlformats.org/presentationml/2006/main">
-  <p:tag name="KSO_WM_DIAGRAM_VIRTUALLY_FRAME" val="{&quot;height&quot;:333.7,&quot;left&quot;:181.0367716535433,&quot;top&quot;:150.5,&quot;width&quot;:585.2126771653544}"/>
+  <p:tag name="COMMONDATA" val="eyJoZGlkIjoiYzZkNzQ4ZWFiZmQ4NTRhOWRkZTk3YTMwMjlmMmZhYmUifQ=="/>
+  <p:tag name="KSO_WPP_MARK_KEY" val="3c15e236-6e17-4788-8b7a-5fd2c15b6c5c"/>
 </p:tagLst>
 </file>
 
@@ -11519,66 +12239,6 @@
 </p:tagLst>
 </file>
 
-<file path=ppt/tags/tag80.xml><?xml version="1.0" encoding="utf-8"?>
-<p:tagLst xmlns:p="http://schemas.openxmlformats.org/presentationml/2006/main">
-  <p:tag name="KSO_WM_DIAGRAM_VIRTUALLY_FRAME" val="{&quot;height&quot;:333.7,&quot;left&quot;:181.0367716535433,&quot;top&quot;:150.5,&quot;width&quot;:585.2126771653544}"/>
-</p:tagLst>
-</file>
-
-<file path=ppt/tags/tag81.xml><?xml version="1.0" encoding="utf-8"?>
-<p:tagLst xmlns:p="http://schemas.openxmlformats.org/presentationml/2006/main">
-  <p:tag name="KSO_WM_DIAGRAM_VIRTUALLY_FRAME" val="{&quot;height&quot;:333.7,&quot;left&quot;:181.0367716535433,&quot;top&quot;:150.5,&quot;width&quot;:585.2126771653544}"/>
-</p:tagLst>
-</file>
-
-<file path=ppt/tags/tag82.xml><?xml version="1.0" encoding="utf-8"?>
-<p:tagLst xmlns:p="http://schemas.openxmlformats.org/presentationml/2006/main">
-  <p:tag name="KSO_WM_DIAGRAM_VIRTUALLY_FRAME" val="{&quot;height&quot;:333.7,&quot;left&quot;:116.85,&quot;top&quot;:150.5,&quot;width&quot;:710.2425984251968}"/>
-</p:tagLst>
-</file>
-
-<file path=ppt/tags/tag83.xml><?xml version="1.0" encoding="utf-8"?>
-<p:tagLst xmlns:p="http://schemas.openxmlformats.org/presentationml/2006/main">
-  <p:tag name="KSO_WM_DIAGRAM_VIRTUALLY_FRAME" val="{&quot;height&quot;:333.7,&quot;left&quot;:116.85,&quot;top&quot;:150.5,&quot;width&quot;:710.2425984251968}"/>
-</p:tagLst>
-</file>
-
-<file path=ppt/tags/tag84.xml><?xml version="1.0" encoding="utf-8"?>
-<p:tagLst xmlns:p="http://schemas.openxmlformats.org/presentationml/2006/main">
-  <p:tag name="KSO_WM_DIAGRAM_VIRTUALLY_FRAME" val="{&quot;height&quot;:333.7,&quot;left&quot;:116.85,&quot;top&quot;:150.5,&quot;width&quot;:710.2425984251968}"/>
-</p:tagLst>
-</file>
-
-<file path=ppt/tags/tag85.xml><?xml version="1.0" encoding="utf-8"?>
-<p:tagLst xmlns:p="http://schemas.openxmlformats.org/presentationml/2006/main">
-  <p:tag name="KSO_WM_DIAGRAM_VIRTUALLY_FRAME" val="{&quot;height&quot;:333.7,&quot;left&quot;:116.85,&quot;top&quot;:150.5,&quot;width&quot;:710.2425984251968}"/>
-</p:tagLst>
-</file>
-
-<file path=ppt/tags/tag86.xml><?xml version="1.0" encoding="utf-8"?>
-<p:tagLst xmlns:p="http://schemas.openxmlformats.org/presentationml/2006/main">
-  <p:tag name="KSO_WM_DIAGRAM_VIRTUALLY_FRAME" val="{&quot;height&quot;:333.7,&quot;left&quot;:116.85,&quot;top&quot;:150.5,&quot;width&quot;:710.2425984251968}"/>
-</p:tagLst>
-</file>
-
-<file path=ppt/tags/tag87.xml><?xml version="1.0" encoding="utf-8"?>
-<p:tagLst xmlns:p="http://schemas.openxmlformats.org/presentationml/2006/main">
-  <p:tag name="KSO_WM_DIAGRAM_VIRTUALLY_FRAME" val="{&quot;height&quot;:333.7,&quot;left&quot;:116.85,&quot;top&quot;:150.5,&quot;width&quot;:710.2425984251968}"/>
-</p:tagLst>
-</file>
-
-<file path=ppt/tags/tag88.xml><?xml version="1.0" encoding="utf-8"?>
-<p:tagLst xmlns:p="http://schemas.openxmlformats.org/presentationml/2006/main">
-  <p:tag name="KSO_WM_DIAGRAM_VIRTUALLY_FRAME" val="{&quot;height&quot;:333.7,&quot;left&quot;:116.85,&quot;top&quot;:150.5,&quot;width&quot;:710.2425984251968}"/>
-</p:tagLst>
-</file>
-
-<file path=ppt/tags/tag89.xml><?xml version="1.0" encoding="utf-8"?>
-<p:tagLst xmlns:p="http://schemas.openxmlformats.org/presentationml/2006/main">
-  <p:tag name="KSO_WM_DIAGRAM_VIRTUALLY_FRAME" val="{&quot;height&quot;:333.7,&quot;left&quot;:116.85,&quot;top&quot;:150.5,&quot;width&quot;:710.2425984251968}"/>
-</p:tagLst>
-</file>
-
 <file path=ppt/tags/tag9.xml><?xml version="1.0" encoding="utf-8"?>
 <p:tagLst xmlns:p="http://schemas.openxmlformats.org/presentationml/2006/main">
   <p:tag name="KSO_WM_UNIT_HIGHLIGHT" val="0"/>
@@ -11589,37 +12249,6 @@
   <p:tag name="KSO_WM_UNIT_LAYERLEVEL" val="1"/>
   <p:tag name="KSO_WM_TAG_VERSION" val="1.0"/>
   <p:tag name="KSO_WM_BEAUTIFY_FLAG" val="#wm#"/>
-</p:tagLst>
-</file>
-
-<file path=ppt/tags/tag90.xml><?xml version="1.0" encoding="utf-8"?>
-<p:tagLst xmlns:p="http://schemas.openxmlformats.org/presentationml/2006/main">
-  <p:tag name="KSO_WM_DIAGRAM_VIRTUALLY_FRAME" val="{&quot;height&quot;:333.7,&quot;left&quot;:116.85,&quot;top&quot;:150.5,&quot;width&quot;:710.2425984251968}"/>
-</p:tagLst>
-</file>
-
-<file path=ppt/tags/tag91.xml><?xml version="1.0" encoding="utf-8"?>
-<p:tagLst xmlns:p="http://schemas.openxmlformats.org/presentationml/2006/main">
-  <p:tag name="KSO_WM_DIAGRAM_VIRTUALLY_FRAME" val="{&quot;height&quot;:333.7,&quot;left&quot;:116.85,&quot;top&quot;:150.5,&quot;width&quot;:710.2425984251968}"/>
-</p:tagLst>
-</file>
-
-<file path=ppt/tags/tag92.xml><?xml version="1.0" encoding="utf-8"?>
-<p:tagLst xmlns:p="http://schemas.openxmlformats.org/presentationml/2006/main">
-  <p:tag name="KSO_WM_DIAGRAM_VIRTUALLY_FRAME" val="{&quot;height&quot;:333.7,&quot;left&quot;:116.85,&quot;top&quot;:150.5,&quot;width&quot;:710.2425984251968}"/>
-</p:tagLst>
-</file>
-
-<file path=ppt/tags/tag93.xml><?xml version="1.0" encoding="utf-8"?>
-<p:tagLst xmlns:p="http://schemas.openxmlformats.org/presentationml/2006/main">
-  <p:tag name="KSO_WM_DIAGRAM_VIRTUALLY_FRAME" val="{&quot;height&quot;:333.7,&quot;left&quot;:116.85,&quot;top&quot;:150.5,&quot;width&quot;:710.2425984251968}"/>
-</p:tagLst>
-</file>
-
-<file path=ppt/tags/tag94.xml><?xml version="1.0" encoding="utf-8"?>
-<p:tagLst xmlns:p="http://schemas.openxmlformats.org/presentationml/2006/main">
-  <p:tag name="COMMONDATA" val="eyJoZGlkIjoiYzZkNzQ4ZWFiZmQ4NTRhOWRkZTk3YTMwMjlmMmZhYmUifQ=="/>
-  <p:tag name="KSO_WPP_MARK_KEY" val="3c15e236-6e17-4788-8b7a-5fd2c15b6c5c"/>
 </p:tagLst>
 </file>
 
